--- a/slides/6_agents.pptx
+++ b/slides/6_agents.pptx
@@ -1116,42 +1116,6 @@
         </a:p>
       </dgm:t>
     </dgm:pt>
-    <dgm:pt modelId="{769F0AC1-E7CF-C944-B9AF-EA28932D2656}">
-      <dgm:prSet/>
-      <dgm:spPr/>
-      <dgm:t>
-        <a:bodyPr/>
-        <a:lstStyle/>
-        <a:p>
-          <a:r>
-            <a:rPr lang="en-US" b="0" dirty="0"/>
-            <a:t>Instruction Tuning</a:t>
-          </a:r>
-        </a:p>
-      </dgm:t>
-    </dgm:pt>
-    <dgm:pt modelId="{8FBFB482-1FAC-2647-9582-FBF2BE51B42C}" type="parTrans" cxnId="{B2C31AC5-CC8D-7848-BF48-4E93CF15F78C}">
-      <dgm:prSet/>
-      <dgm:spPr/>
-      <dgm:t>
-        <a:bodyPr/>
-        <a:lstStyle/>
-        <a:p>
-          <a:endParaRPr lang="de-DE"/>
-        </a:p>
-      </dgm:t>
-    </dgm:pt>
-    <dgm:pt modelId="{202C7746-1898-184B-8901-869D8C7ADB05}" type="sibTrans" cxnId="{B2C31AC5-CC8D-7848-BF48-4E93CF15F78C}">
-      <dgm:prSet/>
-      <dgm:spPr/>
-      <dgm:t>
-        <a:bodyPr/>
-        <a:lstStyle/>
-        <a:p>
-          <a:endParaRPr lang="de-DE"/>
-        </a:p>
-      </dgm:t>
-    </dgm:pt>
     <dgm:pt modelId="{A5BBF571-5253-6E40-82D7-7DFA55C403EE}">
       <dgm:prSet/>
       <dgm:spPr/>
@@ -1199,7 +1163,7 @@
       <dgm:spPr/>
     </dgm:pt>
     <dgm:pt modelId="{4F1690E2-16BD-2B42-AE98-F2A735104EFA}" type="pres">
-      <dgm:prSet presAssocID="{1EA944AD-327D-427D-A5F0-7AE39B4AFACB}" presName="thickLine" presStyleLbl="alignNode1" presStyleIdx="0" presStyleCnt="8"/>
+      <dgm:prSet presAssocID="{1EA944AD-327D-427D-A5F0-7AE39B4AFACB}" presName="thickLine" presStyleLbl="alignNode1" presStyleIdx="0" presStyleCnt="7"/>
       <dgm:spPr/>
     </dgm:pt>
     <dgm:pt modelId="{7B746AAE-0D31-DE44-A5F6-86F76B8A3E80}" type="pres">
@@ -1207,7 +1171,7 @@
       <dgm:spPr/>
     </dgm:pt>
     <dgm:pt modelId="{D28CB533-C51E-334E-9261-65C425A19706}" type="pres">
-      <dgm:prSet presAssocID="{1EA944AD-327D-427D-A5F0-7AE39B4AFACB}" presName="tx1" presStyleLbl="revTx" presStyleIdx="0" presStyleCnt="8"/>
+      <dgm:prSet presAssocID="{1EA944AD-327D-427D-A5F0-7AE39B4AFACB}" presName="tx1" presStyleLbl="revTx" presStyleIdx="0" presStyleCnt="7"/>
       <dgm:spPr/>
     </dgm:pt>
     <dgm:pt modelId="{4B5756DB-F77A-B44F-B3F7-F3894F36872A}" type="pres">
@@ -1215,7 +1179,7 @@
       <dgm:spPr/>
     </dgm:pt>
     <dgm:pt modelId="{A11F9CE2-7889-D042-B67A-3B946F072596}" type="pres">
-      <dgm:prSet presAssocID="{0C6B1536-6269-470E-891B-548B1A1741C8}" presName="thickLine" presStyleLbl="alignNode1" presStyleIdx="1" presStyleCnt="8"/>
+      <dgm:prSet presAssocID="{0C6B1536-6269-470E-891B-548B1A1741C8}" presName="thickLine" presStyleLbl="alignNode1" presStyleIdx="1" presStyleCnt="7"/>
       <dgm:spPr/>
     </dgm:pt>
     <dgm:pt modelId="{FDBEDC87-8791-4D44-8FD8-85B48AD39373}" type="pres">
@@ -1223,7 +1187,7 @@
       <dgm:spPr/>
     </dgm:pt>
     <dgm:pt modelId="{8D7BB36B-DCB0-1945-8136-BD40AAFC958C}" type="pres">
-      <dgm:prSet presAssocID="{0C6B1536-6269-470E-891B-548B1A1741C8}" presName="tx1" presStyleLbl="revTx" presStyleIdx="1" presStyleCnt="8"/>
+      <dgm:prSet presAssocID="{0C6B1536-6269-470E-891B-548B1A1741C8}" presName="tx1" presStyleLbl="revTx" presStyleIdx="1" presStyleCnt="7"/>
       <dgm:spPr/>
     </dgm:pt>
     <dgm:pt modelId="{DCBD3594-6E80-0B41-BD87-AFAFE90B7B0C}" type="pres">
@@ -1231,7 +1195,7 @@
       <dgm:spPr/>
     </dgm:pt>
     <dgm:pt modelId="{9D950D6B-5C89-8A48-9960-CA8B4C499A1A}" type="pres">
-      <dgm:prSet presAssocID="{A5BBF571-5253-6E40-82D7-7DFA55C403EE}" presName="thickLine" presStyleLbl="alignNode1" presStyleIdx="2" presStyleCnt="8"/>
+      <dgm:prSet presAssocID="{A5BBF571-5253-6E40-82D7-7DFA55C403EE}" presName="thickLine" presStyleLbl="alignNode1" presStyleIdx="2" presStyleCnt="7"/>
       <dgm:spPr/>
     </dgm:pt>
     <dgm:pt modelId="{743C7BE5-F107-5047-8108-35976C730BE6}" type="pres">
@@ -1239,7 +1203,7 @@
       <dgm:spPr/>
     </dgm:pt>
     <dgm:pt modelId="{1B96839A-94C6-3747-AECB-6AFE26E91254}" type="pres">
-      <dgm:prSet presAssocID="{A5BBF571-5253-6E40-82D7-7DFA55C403EE}" presName="tx1" presStyleLbl="revTx" presStyleIdx="2" presStyleCnt="8"/>
+      <dgm:prSet presAssocID="{A5BBF571-5253-6E40-82D7-7DFA55C403EE}" presName="tx1" presStyleLbl="revTx" presStyleIdx="2" presStyleCnt="7"/>
       <dgm:spPr/>
     </dgm:pt>
     <dgm:pt modelId="{437624BB-39AA-794C-B0F6-B2CF5CA2B5A0}" type="pres">
@@ -1247,7 +1211,7 @@
       <dgm:spPr/>
     </dgm:pt>
     <dgm:pt modelId="{34CF0AAF-5C3E-5349-AD9D-2034F634313C}" type="pres">
-      <dgm:prSet presAssocID="{5F8A9840-886B-1549-86FA-DFF28283C6F7}" presName="thickLine" presStyleLbl="alignNode1" presStyleIdx="3" presStyleCnt="8"/>
+      <dgm:prSet presAssocID="{5F8A9840-886B-1549-86FA-DFF28283C6F7}" presName="thickLine" presStyleLbl="alignNode1" presStyleIdx="3" presStyleCnt="7"/>
       <dgm:spPr/>
     </dgm:pt>
     <dgm:pt modelId="{2F409A89-4A7E-3D4A-93C7-15493EA49A4E}" type="pres">
@@ -1255,7 +1219,7 @@
       <dgm:spPr/>
     </dgm:pt>
     <dgm:pt modelId="{D2ABD2C0-EDD7-194E-81CA-D9A5311A1607}" type="pres">
-      <dgm:prSet presAssocID="{5F8A9840-886B-1549-86FA-DFF28283C6F7}" presName="tx1" presStyleLbl="revTx" presStyleIdx="3" presStyleCnt="8"/>
+      <dgm:prSet presAssocID="{5F8A9840-886B-1549-86FA-DFF28283C6F7}" presName="tx1" presStyleLbl="revTx" presStyleIdx="3" presStyleCnt="7"/>
       <dgm:spPr/>
     </dgm:pt>
     <dgm:pt modelId="{F666EF11-8510-CD40-BB10-489FF0DA3CFF}" type="pres">
@@ -1263,7 +1227,7 @@
       <dgm:spPr/>
     </dgm:pt>
     <dgm:pt modelId="{8A505F94-65E4-9D41-AC2C-CCE8BD4C175F}" type="pres">
-      <dgm:prSet presAssocID="{288D3E87-5781-4F83-84CB-1610EAD21773}" presName="thickLine" presStyleLbl="alignNode1" presStyleIdx="4" presStyleCnt="8"/>
+      <dgm:prSet presAssocID="{288D3E87-5781-4F83-84CB-1610EAD21773}" presName="thickLine" presStyleLbl="alignNode1" presStyleIdx="4" presStyleCnt="7"/>
       <dgm:spPr/>
     </dgm:pt>
     <dgm:pt modelId="{B678B193-63FE-3044-8C53-579A035591F8}" type="pres">
@@ -1271,31 +1235,15 @@
       <dgm:spPr/>
     </dgm:pt>
     <dgm:pt modelId="{6E572D5D-DE9A-BF49-8B86-50D4250D1411}" type="pres">
-      <dgm:prSet presAssocID="{288D3E87-5781-4F83-84CB-1610EAD21773}" presName="tx1" presStyleLbl="revTx" presStyleIdx="4" presStyleCnt="8"/>
+      <dgm:prSet presAssocID="{288D3E87-5781-4F83-84CB-1610EAD21773}" presName="tx1" presStyleLbl="revTx" presStyleIdx="4" presStyleCnt="7"/>
       <dgm:spPr/>
     </dgm:pt>
     <dgm:pt modelId="{7F071049-5D5A-2445-8B31-652B1063C281}" type="pres">
       <dgm:prSet presAssocID="{288D3E87-5781-4F83-84CB-1610EAD21773}" presName="vert1" presStyleCnt="0"/>
       <dgm:spPr/>
     </dgm:pt>
-    <dgm:pt modelId="{322460D7-6763-F646-87E9-10A1FE9FDC20}" type="pres">
-      <dgm:prSet presAssocID="{769F0AC1-E7CF-C944-B9AF-EA28932D2656}" presName="thickLine" presStyleLbl="alignNode1" presStyleIdx="5" presStyleCnt="8"/>
-      <dgm:spPr/>
-    </dgm:pt>
-    <dgm:pt modelId="{2E474F08-D54F-E14D-9A99-2C037C893DD5}" type="pres">
-      <dgm:prSet presAssocID="{769F0AC1-E7CF-C944-B9AF-EA28932D2656}" presName="horz1" presStyleCnt="0"/>
-      <dgm:spPr/>
-    </dgm:pt>
-    <dgm:pt modelId="{9B5DA0EB-3C02-EE40-A02E-5B28D39BEF31}" type="pres">
-      <dgm:prSet presAssocID="{769F0AC1-E7CF-C944-B9AF-EA28932D2656}" presName="tx1" presStyleLbl="revTx" presStyleIdx="5" presStyleCnt="8"/>
-      <dgm:spPr/>
-    </dgm:pt>
-    <dgm:pt modelId="{062608B4-F5A4-C943-8091-EEFBA40E325A}" type="pres">
-      <dgm:prSet presAssocID="{769F0AC1-E7CF-C944-B9AF-EA28932D2656}" presName="vert1" presStyleCnt="0"/>
-      <dgm:spPr/>
-    </dgm:pt>
     <dgm:pt modelId="{3D5DC94A-13EE-9348-AB63-BA6D7AB77EF3}" type="pres">
-      <dgm:prSet presAssocID="{DDA901FD-5C05-41F1-A824-5C833C35698E}" presName="thickLine" presStyleLbl="alignNode1" presStyleIdx="6" presStyleCnt="8"/>
+      <dgm:prSet presAssocID="{DDA901FD-5C05-41F1-A824-5C833C35698E}" presName="thickLine" presStyleLbl="alignNode1" presStyleIdx="5" presStyleCnt="7"/>
       <dgm:spPr/>
     </dgm:pt>
     <dgm:pt modelId="{27EB4548-6597-7A48-B8EB-8D5D075E0879}" type="pres">
@@ -1303,7 +1251,7 @@
       <dgm:spPr/>
     </dgm:pt>
     <dgm:pt modelId="{B71E94BA-938F-EC4F-AA59-749EE236EA14}" type="pres">
-      <dgm:prSet presAssocID="{DDA901FD-5C05-41F1-A824-5C833C35698E}" presName="tx1" presStyleLbl="revTx" presStyleIdx="6" presStyleCnt="8"/>
+      <dgm:prSet presAssocID="{DDA901FD-5C05-41F1-A824-5C833C35698E}" presName="tx1" presStyleLbl="revTx" presStyleIdx="5" presStyleCnt="7"/>
       <dgm:spPr/>
     </dgm:pt>
     <dgm:pt modelId="{AB286E63-B7A7-4244-8719-A27E1E499373}" type="pres">
@@ -1311,7 +1259,7 @@
       <dgm:spPr/>
     </dgm:pt>
     <dgm:pt modelId="{20D72B1E-AD82-9E49-86D8-09A4DD4D6212}" type="pres">
-      <dgm:prSet presAssocID="{5F30F6BE-7A6E-4F0D-B3AA-2B05FD8FA60B}" presName="thickLine" presStyleLbl="alignNode1" presStyleIdx="7" presStyleCnt="8"/>
+      <dgm:prSet presAssocID="{5F30F6BE-7A6E-4F0D-B3AA-2B05FD8FA60B}" presName="thickLine" presStyleLbl="alignNode1" presStyleIdx="6" presStyleCnt="7"/>
       <dgm:spPr/>
     </dgm:pt>
     <dgm:pt modelId="{FE30EA44-022B-FF41-BE9E-EF735E26A50E}" type="pres">
@@ -1319,7 +1267,7 @@
       <dgm:spPr/>
     </dgm:pt>
     <dgm:pt modelId="{08701614-A5A0-9544-95A3-640A46D860BF}" type="pres">
-      <dgm:prSet presAssocID="{5F30F6BE-7A6E-4F0D-B3AA-2B05FD8FA60B}" presName="tx1" presStyleLbl="revTx" presStyleIdx="7" presStyleCnt="8"/>
+      <dgm:prSet presAssocID="{5F30F6BE-7A6E-4F0D-B3AA-2B05FD8FA60B}" presName="tx1" presStyleLbl="revTx" presStyleIdx="6" presStyleCnt="7"/>
       <dgm:spPr/>
     </dgm:pt>
     <dgm:pt modelId="{5BC0372B-66B7-0640-8199-37B331256C9A}" type="pres">
@@ -1331,7 +1279,7 @@
     <dgm:cxn modelId="{48E2F92B-7174-CF40-BB56-062756623EA4}" type="presOf" srcId="{288D3E87-5781-4F83-84CB-1610EAD21773}" destId="{6E572D5D-DE9A-BF49-8B86-50D4250D1411}" srcOrd="0" destOrd="0" presId="urn:microsoft.com/office/officeart/2008/layout/LinedList"/>
     <dgm:cxn modelId="{7F381230-3114-44FB-913E-0CD35BF36BA2}" srcId="{56648FB5-C09B-4C87-AEF3-A553C798BCF5}" destId="{0C6B1536-6269-470E-891B-548B1A1741C8}" srcOrd="1" destOrd="0" parTransId="{BA3188B2-0301-4CA0-AC58-59A0732D4CC9}" sibTransId="{E7BF0292-5C5E-44B5-9020-5B605116E8F8}"/>
     <dgm:cxn modelId="{47933137-DA02-BE4A-92B7-574CA30C7525}" srcId="{56648FB5-C09B-4C87-AEF3-A553C798BCF5}" destId="{A5BBF571-5253-6E40-82D7-7DFA55C403EE}" srcOrd="2" destOrd="0" parTransId="{3F510184-3A7A-F04A-AB3A-A6DA046D9501}" sibTransId="{EBB0758C-E85A-AE4B-A658-5E0A4625321C}"/>
-    <dgm:cxn modelId="{76557D45-55A9-46E4-80D0-E1396A52CE52}" srcId="{56648FB5-C09B-4C87-AEF3-A553C798BCF5}" destId="{DDA901FD-5C05-41F1-A824-5C833C35698E}" srcOrd="6" destOrd="0" parTransId="{D760294E-1D9B-408E-B689-8391D4CF7D9C}" sibTransId="{EDCB14DE-D3C3-4E5C-A331-71113C0250BD}"/>
+    <dgm:cxn modelId="{76557D45-55A9-46E4-80D0-E1396A52CE52}" srcId="{56648FB5-C09B-4C87-AEF3-A553C798BCF5}" destId="{DDA901FD-5C05-41F1-A824-5C833C35698E}" srcOrd="5" destOrd="0" parTransId="{D760294E-1D9B-408E-B689-8391D4CF7D9C}" sibTransId="{EDCB14DE-D3C3-4E5C-A331-71113C0250BD}"/>
     <dgm:cxn modelId="{DC6A2B55-9959-9E41-8C4C-FB8FF415BF70}" type="presOf" srcId="{A5BBF571-5253-6E40-82D7-7DFA55C403EE}" destId="{1B96839A-94C6-3747-AECB-6AFE26E91254}" srcOrd="0" destOrd="0" presId="urn:microsoft.com/office/officeart/2008/layout/LinedList"/>
     <dgm:cxn modelId="{5328FF68-AF12-2640-82DD-4A8558848644}" type="presOf" srcId="{5F8A9840-886B-1549-86FA-DFF28283C6F7}" destId="{D2ABD2C0-EDD7-194E-81CA-D9A5311A1607}" srcOrd="0" destOrd="0" presId="urn:microsoft.com/office/officeart/2008/layout/LinedList"/>
     <dgm:cxn modelId="{B8B43377-1557-2042-BB5A-D55D04913284}" type="presOf" srcId="{0C6B1536-6269-470E-891B-548B1A1741C8}" destId="{8D7BB36B-DCB0-1945-8136-BD40AAFC958C}" srcOrd="0" destOrd="0" presId="urn:microsoft.com/office/officeart/2008/layout/LinedList"/>
@@ -1339,10 +1287,8 @@
     <dgm:cxn modelId="{D9602A80-E4B9-A44F-8F18-41878FC23717}" type="presOf" srcId="{1EA944AD-327D-427D-A5F0-7AE39B4AFACB}" destId="{D28CB533-C51E-334E-9261-65C425A19706}" srcOrd="0" destOrd="0" presId="urn:microsoft.com/office/officeart/2008/layout/LinedList"/>
     <dgm:cxn modelId="{4B05A8AF-8E44-411A-9840-24940C52F31E}" srcId="{56648FB5-C09B-4C87-AEF3-A553C798BCF5}" destId="{288D3E87-5781-4F83-84CB-1610EAD21773}" srcOrd="4" destOrd="0" parTransId="{5D1CA44E-A2B8-416C-AF5D-FE642F689AF8}" sibTransId="{E930F8F9-CD27-4F21-8645-528352089D37}"/>
     <dgm:cxn modelId="{946460B5-6A24-4AD5-9BDB-D5E7AE78994B}" srcId="{56648FB5-C09B-4C87-AEF3-A553C798BCF5}" destId="{1EA944AD-327D-427D-A5F0-7AE39B4AFACB}" srcOrd="0" destOrd="0" parTransId="{C379FD06-505A-41F8-9A66-4E9F695F9C1A}" sibTransId="{AD9B37F6-7A60-4E62-AE70-54601B347097}"/>
-    <dgm:cxn modelId="{5E824FB9-2CC4-6F45-B749-FE401FFAEECB}" type="presOf" srcId="{769F0AC1-E7CF-C944-B9AF-EA28932D2656}" destId="{9B5DA0EB-3C02-EE40-A02E-5B28D39BEF31}" srcOrd="0" destOrd="0" presId="urn:microsoft.com/office/officeart/2008/layout/LinedList"/>
-    <dgm:cxn modelId="{B2C31AC5-CC8D-7848-BF48-4E93CF15F78C}" srcId="{56648FB5-C09B-4C87-AEF3-A553C798BCF5}" destId="{769F0AC1-E7CF-C944-B9AF-EA28932D2656}" srcOrd="5" destOrd="0" parTransId="{8FBFB482-1FAC-2647-9582-FBF2BE51B42C}" sibTransId="{202C7746-1898-184B-8901-869D8C7ADB05}"/>
     <dgm:cxn modelId="{AA560ECB-5494-694A-8753-2D77B2337369}" type="presOf" srcId="{DDA901FD-5C05-41F1-A824-5C833C35698E}" destId="{B71E94BA-938F-EC4F-AA59-749EE236EA14}" srcOrd="0" destOrd="0" presId="urn:microsoft.com/office/officeart/2008/layout/LinedList"/>
-    <dgm:cxn modelId="{336AE3DC-37F1-4955-813F-D94B74C0A559}" srcId="{56648FB5-C09B-4C87-AEF3-A553C798BCF5}" destId="{5F30F6BE-7A6E-4F0D-B3AA-2B05FD8FA60B}" srcOrd="7" destOrd="0" parTransId="{204DD833-1CD5-42F1-B596-8D8B6D369E5E}" sibTransId="{838162BB-5917-468F-85CC-DC0FE427929A}"/>
+    <dgm:cxn modelId="{336AE3DC-37F1-4955-813F-D94B74C0A559}" srcId="{56648FB5-C09B-4C87-AEF3-A553C798BCF5}" destId="{5F30F6BE-7A6E-4F0D-B3AA-2B05FD8FA60B}" srcOrd="6" destOrd="0" parTransId="{204DD833-1CD5-42F1-B596-8D8B6D369E5E}" sibTransId="{838162BB-5917-468F-85CC-DC0FE427929A}"/>
     <dgm:cxn modelId="{9C4437E1-A996-CF40-B2F7-2FD90BC18B8E}" srcId="{56648FB5-C09B-4C87-AEF3-A553C798BCF5}" destId="{5F8A9840-886B-1549-86FA-DFF28283C6F7}" srcOrd="3" destOrd="0" parTransId="{A0E52CAA-BC0A-2241-8286-5195FC90ACDB}" sibTransId="{1EDED046-CF50-0248-AC64-C3620E7361E1}"/>
     <dgm:cxn modelId="{83FBB8F5-9153-F24C-B359-92AB22A3F5BF}" type="presOf" srcId="{56648FB5-C09B-4C87-AEF3-A553C798BCF5}" destId="{7852B3C2-A44C-F446-9060-CA21A0D28991}" srcOrd="0" destOrd="0" presId="urn:microsoft.com/office/officeart/2008/layout/LinedList"/>
     <dgm:cxn modelId="{F5D2E861-C6DE-FB42-B7C6-B065F1F84377}" type="presParOf" srcId="{7852B3C2-A44C-F446-9060-CA21A0D28991}" destId="{4F1690E2-16BD-2B42-AE98-F2A735104EFA}" srcOrd="0" destOrd="0" presId="urn:microsoft.com/office/officeart/2008/layout/LinedList"/>
@@ -1365,16 +1311,12 @@
     <dgm:cxn modelId="{0B980FB1-5585-2342-BD3C-2366897F0984}" type="presParOf" srcId="{7852B3C2-A44C-F446-9060-CA21A0D28991}" destId="{B678B193-63FE-3044-8C53-579A035591F8}" srcOrd="9" destOrd="0" presId="urn:microsoft.com/office/officeart/2008/layout/LinedList"/>
     <dgm:cxn modelId="{240D9A74-D193-CC40-97CA-ADC859B1D81F}" type="presParOf" srcId="{B678B193-63FE-3044-8C53-579A035591F8}" destId="{6E572D5D-DE9A-BF49-8B86-50D4250D1411}" srcOrd="0" destOrd="0" presId="urn:microsoft.com/office/officeart/2008/layout/LinedList"/>
     <dgm:cxn modelId="{3B1F9830-A4D6-E140-AE33-31C05CB5B37E}" type="presParOf" srcId="{B678B193-63FE-3044-8C53-579A035591F8}" destId="{7F071049-5D5A-2445-8B31-652B1063C281}" srcOrd="1" destOrd="0" presId="urn:microsoft.com/office/officeart/2008/layout/LinedList"/>
-    <dgm:cxn modelId="{9A7F5AD0-DD95-3843-95C2-CCB3573D0F7B}" type="presParOf" srcId="{7852B3C2-A44C-F446-9060-CA21A0D28991}" destId="{322460D7-6763-F646-87E9-10A1FE9FDC20}" srcOrd="10" destOrd="0" presId="urn:microsoft.com/office/officeart/2008/layout/LinedList"/>
-    <dgm:cxn modelId="{0F8C97D4-B05E-6947-AB11-E0CE7BA1FBBB}" type="presParOf" srcId="{7852B3C2-A44C-F446-9060-CA21A0D28991}" destId="{2E474F08-D54F-E14D-9A99-2C037C893DD5}" srcOrd="11" destOrd="0" presId="urn:microsoft.com/office/officeart/2008/layout/LinedList"/>
-    <dgm:cxn modelId="{24B86091-C966-5641-9975-3A18E8CC2451}" type="presParOf" srcId="{2E474F08-D54F-E14D-9A99-2C037C893DD5}" destId="{9B5DA0EB-3C02-EE40-A02E-5B28D39BEF31}" srcOrd="0" destOrd="0" presId="urn:microsoft.com/office/officeart/2008/layout/LinedList"/>
-    <dgm:cxn modelId="{C6076B37-8BDA-7348-B420-D00A46E8547E}" type="presParOf" srcId="{2E474F08-D54F-E14D-9A99-2C037C893DD5}" destId="{062608B4-F5A4-C943-8091-EEFBA40E325A}" srcOrd="1" destOrd="0" presId="urn:microsoft.com/office/officeart/2008/layout/LinedList"/>
-    <dgm:cxn modelId="{7A9EE529-C307-D440-8910-336F08C35B83}" type="presParOf" srcId="{7852B3C2-A44C-F446-9060-CA21A0D28991}" destId="{3D5DC94A-13EE-9348-AB63-BA6D7AB77EF3}" srcOrd="12" destOrd="0" presId="urn:microsoft.com/office/officeart/2008/layout/LinedList"/>
-    <dgm:cxn modelId="{B6134942-BB7E-6A49-B625-7DF71CC12E8A}" type="presParOf" srcId="{7852B3C2-A44C-F446-9060-CA21A0D28991}" destId="{27EB4548-6597-7A48-B8EB-8D5D075E0879}" srcOrd="13" destOrd="0" presId="urn:microsoft.com/office/officeart/2008/layout/LinedList"/>
+    <dgm:cxn modelId="{7A9EE529-C307-D440-8910-336F08C35B83}" type="presParOf" srcId="{7852B3C2-A44C-F446-9060-CA21A0D28991}" destId="{3D5DC94A-13EE-9348-AB63-BA6D7AB77EF3}" srcOrd="10" destOrd="0" presId="urn:microsoft.com/office/officeart/2008/layout/LinedList"/>
+    <dgm:cxn modelId="{B6134942-BB7E-6A49-B625-7DF71CC12E8A}" type="presParOf" srcId="{7852B3C2-A44C-F446-9060-CA21A0D28991}" destId="{27EB4548-6597-7A48-B8EB-8D5D075E0879}" srcOrd="11" destOrd="0" presId="urn:microsoft.com/office/officeart/2008/layout/LinedList"/>
     <dgm:cxn modelId="{305C651D-0D92-1E46-AC15-0FFBF9C77550}" type="presParOf" srcId="{27EB4548-6597-7A48-B8EB-8D5D075E0879}" destId="{B71E94BA-938F-EC4F-AA59-749EE236EA14}" srcOrd="0" destOrd="0" presId="urn:microsoft.com/office/officeart/2008/layout/LinedList"/>
     <dgm:cxn modelId="{6A8C2A6C-DA48-E74E-9F29-7B72A279E967}" type="presParOf" srcId="{27EB4548-6597-7A48-B8EB-8D5D075E0879}" destId="{AB286E63-B7A7-4244-8719-A27E1E499373}" srcOrd="1" destOrd="0" presId="urn:microsoft.com/office/officeart/2008/layout/LinedList"/>
-    <dgm:cxn modelId="{D4FDD938-A0E5-1344-91E8-DB626E229B73}" type="presParOf" srcId="{7852B3C2-A44C-F446-9060-CA21A0D28991}" destId="{20D72B1E-AD82-9E49-86D8-09A4DD4D6212}" srcOrd="14" destOrd="0" presId="urn:microsoft.com/office/officeart/2008/layout/LinedList"/>
-    <dgm:cxn modelId="{3CB3EB14-3FB4-7040-B2C6-572E38DFBAF8}" type="presParOf" srcId="{7852B3C2-A44C-F446-9060-CA21A0D28991}" destId="{FE30EA44-022B-FF41-BE9E-EF735E26A50E}" srcOrd="15" destOrd="0" presId="urn:microsoft.com/office/officeart/2008/layout/LinedList"/>
+    <dgm:cxn modelId="{D4FDD938-A0E5-1344-91E8-DB626E229B73}" type="presParOf" srcId="{7852B3C2-A44C-F446-9060-CA21A0D28991}" destId="{20D72B1E-AD82-9E49-86D8-09A4DD4D6212}" srcOrd="12" destOrd="0" presId="urn:microsoft.com/office/officeart/2008/layout/LinedList"/>
+    <dgm:cxn modelId="{3CB3EB14-3FB4-7040-B2C6-572E38DFBAF8}" type="presParOf" srcId="{7852B3C2-A44C-F446-9060-CA21A0D28991}" destId="{FE30EA44-022B-FF41-BE9E-EF735E26A50E}" srcOrd="13" destOrd="0" presId="urn:microsoft.com/office/officeart/2008/layout/LinedList"/>
     <dgm:cxn modelId="{0ECA1AF6-D499-C74C-B742-8D288CCF75FA}" type="presParOf" srcId="{FE30EA44-022B-FF41-BE9E-EF735E26A50E}" destId="{08701614-A5A0-9544-95A3-640A46D860BF}" srcOrd="0" destOrd="0" presId="urn:microsoft.com/office/officeart/2008/layout/LinedList"/>
     <dgm:cxn modelId="{AD84564D-97AD-C847-ACA7-6607F1C92514}" type="presParOf" srcId="{FE30EA44-022B-FF41-BE9E-EF735E26A50E}" destId="{5BC0372B-66B7-0640-8199-37B331256C9A}" srcOrd="1" destOrd="0" presId="urn:microsoft.com/office/officeart/2008/layout/LinedList"/>
   </dgm:cxnLst>
@@ -1403,7 +1345,7 @@
       </dsp:nvSpPr>
       <dsp:spPr>
         <a:xfrm>
-          <a:off x="0" y="0"/>
+          <a:off x="0" y="531"/>
           <a:ext cx="10515600" cy="0"/>
         </a:xfrm>
         <a:prstGeom prst="line">
@@ -1453,8 +1395,8 @@
       </dsp:nvSpPr>
       <dsp:spPr>
         <a:xfrm>
-          <a:off x="0" y="0"/>
-          <a:ext cx="10515600" cy="543917"/>
+          <a:off x="0" y="531"/>
+          <a:ext cx="10515600" cy="621467"/>
         </a:xfrm>
         <a:prstGeom prst="rect">
           <a:avLst/>
@@ -1478,12 +1420,12 @@
         <a:fontRef idx="minor"/>
       </dsp:style>
       <dsp:txBody>
-        <a:bodyPr spcFirstLastPara="0" vert="horz" wrap="square" lIns="95250" tIns="95250" rIns="95250" bIns="95250" numCol="1" spcCol="1270" anchor="t" anchorCtr="0">
+        <a:bodyPr spcFirstLastPara="0" vert="horz" wrap="square" lIns="106680" tIns="106680" rIns="106680" bIns="106680" numCol="1" spcCol="1270" anchor="t" anchorCtr="0">
           <a:noAutofit/>
         </a:bodyPr>
         <a:lstStyle/>
         <a:p>
-          <a:pPr marL="0" lvl="0" indent="0" algn="l" defTabSz="1111250">
+          <a:pPr marL="0" lvl="0" indent="0" algn="l" defTabSz="1244600">
             <a:lnSpc>
               <a:spcPct val="90000"/>
             </a:lnSpc>
@@ -1496,15 +1438,15 @@
             <a:buNone/>
           </a:pPr>
           <a:r>
-            <a:rPr lang="de-DE" sz="2500" b="0" kern="1200" dirty="0"/>
+            <a:rPr lang="de-DE" sz="2800" b="0" kern="1200" dirty="0"/>
             <a:t>Deep Learning</a:t>
           </a:r>
-          <a:endParaRPr lang="en-US" sz="2500" b="0" kern="1200" dirty="0"/>
+          <a:endParaRPr lang="en-US" sz="2800" b="0" kern="1200" dirty="0"/>
         </a:p>
       </dsp:txBody>
       <dsp:txXfrm>
-        <a:off x="0" y="0"/>
-        <a:ext cx="10515600" cy="543917"/>
+        <a:off x="0" y="531"/>
+        <a:ext cx="10515600" cy="621467"/>
       </dsp:txXfrm>
     </dsp:sp>
     <dsp:sp modelId="{A11F9CE2-7889-D042-B67A-3B946F072596}">
@@ -1514,7 +1456,7 @@
       </dsp:nvSpPr>
       <dsp:spPr>
         <a:xfrm>
-          <a:off x="0" y="543917"/>
+          <a:off x="0" y="621999"/>
           <a:ext cx="10515600" cy="0"/>
         </a:xfrm>
         <a:prstGeom prst="line">
@@ -1564,8 +1506,8 @@
       </dsp:nvSpPr>
       <dsp:spPr>
         <a:xfrm>
-          <a:off x="0" y="543917"/>
-          <a:ext cx="10515600" cy="543917"/>
+          <a:off x="0" y="621999"/>
+          <a:ext cx="10515600" cy="621467"/>
         </a:xfrm>
         <a:prstGeom prst="rect">
           <a:avLst/>
@@ -1589,12 +1531,12 @@
         <a:fontRef idx="minor"/>
       </dsp:style>
       <dsp:txBody>
-        <a:bodyPr spcFirstLastPara="0" vert="horz" wrap="square" lIns="95250" tIns="95250" rIns="95250" bIns="95250" numCol="1" spcCol="1270" anchor="t" anchorCtr="0">
+        <a:bodyPr spcFirstLastPara="0" vert="horz" wrap="square" lIns="106680" tIns="106680" rIns="106680" bIns="106680" numCol="1" spcCol="1270" anchor="t" anchorCtr="0">
           <a:noAutofit/>
         </a:bodyPr>
         <a:lstStyle/>
         <a:p>
-          <a:pPr marL="0" lvl="0" indent="0" algn="l" defTabSz="1111250">
+          <a:pPr marL="0" lvl="0" indent="0" algn="l" defTabSz="1244600">
             <a:lnSpc>
               <a:spcPct val="90000"/>
             </a:lnSpc>
@@ -1607,15 +1549,15 @@
             <a:buNone/>
           </a:pPr>
           <a:r>
-            <a:rPr lang="de-DE" sz="2500" b="0" kern="1200" dirty="0"/>
+            <a:rPr lang="de-DE" sz="2800" b="0" kern="1200" dirty="0"/>
             <a:t>Transformer</a:t>
           </a:r>
-          <a:endParaRPr lang="en-US" sz="2500" b="0" kern="1200" dirty="0"/>
+          <a:endParaRPr lang="en-US" sz="2800" b="0" kern="1200" dirty="0"/>
         </a:p>
       </dsp:txBody>
       <dsp:txXfrm>
-        <a:off x="0" y="543917"/>
-        <a:ext cx="10515600" cy="543917"/>
+        <a:off x="0" y="621999"/>
+        <a:ext cx="10515600" cy="621467"/>
       </dsp:txXfrm>
     </dsp:sp>
     <dsp:sp modelId="{9D950D6B-5C89-8A48-9960-CA8B4C499A1A}">
@@ -1625,7 +1567,7 @@
       </dsp:nvSpPr>
       <dsp:spPr>
         <a:xfrm>
-          <a:off x="0" y="1087834"/>
+          <a:off x="0" y="1243467"/>
           <a:ext cx="10515600" cy="0"/>
         </a:xfrm>
         <a:prstGeom prst="line">
@@ -1675,8 +1617,8 @@
       </dsp:nvSpPr>
       <dsp:spPr>
         <a:xfrm>
-          <a:off x="0" y="1087834"/>
-          <a:ext cx="10515600" cy="543917"/>
+          <a:off x="0" y="1243467"/>
+          <a:ext cx="10515600" cy="621467"/>
         </a:xfrm>
         <a:prstGeom prst="rect">
           <a:avLst/>
@@ -1700,12 +1642,12 @@
         <a:fontRef idx="minor"/>
       </dsp:style>
       <dsp:txBody>
-        <a:bodyPr spcFirstLastPara="0" vert="horz" wrap="square" lIns="95250" tIns="95250" rIns="95250" bIns="95250" numCol="1" spcCol="1270" anchor="t" anchorCtr="0">
+        <a:bodyPr spcFirstLastPara="0" vert="horz" wrap="square" lIns="106680" tIns="106680" rIns="106680" bIns="106680" numCol="1" spcCol="1270" anchor="t" anchorCtr="0">
           <a:noAutofit/>
         </a:bodyPr>
         <a:lstStyle/>
         <a:p>
-          <a:pPr marL="0" lvl="0" indent="0" algn="l" defTabSz="1111250">
+          <a:pPr marL="0" lvl="0" indent="0" algn="l" defTabSz="1244600">
             <a:lnSpc>
               <a:spcPct val="90000"/>
             </a:lnSpc>
@@ -1718,14 +1660,14 @@
             <a:buNone/>
           </a:pPr>
           <a:r>
-            <a:rPr lang="en-US" sz="2500" b="0" kern="1200" dirty="0"/>
+            <a:rPr lang="en-US" sz="2800" b="0" kern="1200" dirty="0"/>
             <a:t>LLMs</a:t>
           </a:r>
         </a:p>
       </dsp:txBody>
       <dsp:txXfrm>
-        <a:off x="0" y="1087834"/>
-        <a:ext cx="10515600" cy="543917"/>
+        <a:off x="0" y="1243467"/>
+        <a:ext cx="10515600" cy="621467"/>
       </dsp:txXfrm>
     </dsp:sp>
     <dsp:sp modelId="{34CF0AAF-5C3E-5349-AD9D-2034F634313C}">
@@ -1735,7 +1677,7 @@
       </dsp:nvSpPr>
       <dsp:spPr>
         <a:xfrm>
-          <a:off x="0" y="1631751"/>
+          <a:off x="0" y="1864935"/>
           <a:ext cx="10515600" cy="0"/>
         </a:xfrm>
         <a:prstGeom prst="line">
@@ -1785,8 +1727,8 @@
       </dsp:nvSpPr>
       <dsp:spPr>
         <a:xfrm>
-          <a:off x="0" y="1631751"/>
-          <a:ext cx="10515600" cy="543917"/>
+          <a:off x="0" y="1864935"/>
+          <a:ext cx="10515600" cy="621467"/>
         </a:xfrm>
         <a:prstGeom prst="rect">
           <a:avLst/>
@@ -1810,12 +1752,12 @@
         <a:fontRef idx="minor"/>
       </dsp:style>
       <dsp:txBody>
-        <a:bodyPr spcFirstLastPara="0" vert="horz" wrap="square" lIns="95250" tIns="95250" rIns="95250" bIns="95250" numCol="1" spcCol="1270" anchor="t" anchorCtr="0">
+        <a:bodyPr spcFirstLastPara="0" vert="horz" wrap="square" lIns="106680" tIns="106680" rIns="106680" bIns="106680" numCol="1" spcCol="1270" anchor="t" anchorCtr="0">
           <a:noAutofit/>
         </a:bodyPr>
         <a:lstStyle/>
         <a:p>
-          <a:pPr marL="0" lvl="0" indent="0" algn="l" defTabSz="1111250">
+          <a:pPr marL="0" lvl="0" indent="0" algn="l" defTabSz="1244600">
             <a:lnSpc>
               <a:spcPct val="90000"/>
             </a:lnSpc>
@@ -1828,14 +1770,14 @@
             <a:buNone/>
           </a:pPr>
           <a:r>
-            <a:rPr lang="en-US" sz="2500" b="0" kern="1200" dirty="0"/>
+            <a:rPr lang="en-US" sz="2800" b="0" kern="1200" dirty="0"/>
             <a:t>Context Engineering</a:t>
           </a:r>
         </a:p>
       </dsp:txBody>
       <dsp:txXfrm>
-        <a:off x="0" y="1631751"/>
-        <a:ext cx="10515600" cy="543917"/>
+        <a:off x="0" y="1864935"/>
+        <a:ext cx="10515600" cy="621467"/>
       </dsp:txXfrm>
     </dsp:sp>
     <dsp:sp modelId="{8A505F94-65E4-9D41-AC2C-CCE8BD4C175F}">
@@ -1845,7 +1787,7 @@
       </dsp:nvSpPr>
       <dsp:spPr>
         <a:xfrm>
-          <a:off x="0" y="2175669"/>
+          <a:off x="0" y="2486402"/>
           <a:ext cx="10515600" cy="0"/>
         </a:xfrm>
         <a:prstGeom prst="line">
@@ -1895,8 +1837,8 @@
       </dsp:nvSpPr>
       <dsp:spPr>
         <a:xfrm>
-          <a:off x="0" y="2175669"/>
-          <a:ext cx="10515600" cy="543917"/>
+          <a:off x="0" y="2486402"/>
+          <a:ext cx="10515600" cy="621467"/>
         </a:xfrm>
         <a:prstGeom prst="rect">
           <a:avLst/>
@@ -1920,12 +1862,12 @@
         <a:fontRef idx="minor"/>
       </dsp:style>
       <dsp:txBody>
-        <a:bodyPr spcFirstLastPara="0" vert="horz" wrap="square" lIns="95250" tIns="95250" rIns="95250" bIns="95250" numCol="1" spcCol="1270" anchor="t" anchorCtr="0">
+        <a:bodyPr spcFirstLastPara="0" vert="horz" wrap="square" lIns="106680" tIns="106680" rIns="106680" bIns="106680" numCol="1" spcCol="1270" anchor="t" anchorCtr="0">
           <a:noAutofit/>
         </a:bodyPr>
         <a:lstStyle/>
         <a:p>
-          <a:pPr marL="0" lvl="0" indent="0" algn="l" defTabSz="1111250">
+          <a:pPr marL="0" lvl="0" indent="0" algn="l" defTabSz="1244600">
             <a:lnSpc>
               <a:spcPct val="90000"/>
             </a:lnSpc>
@@ -1938,125 +1880,15 @@
             <a:buNone/>
           </a:pPr>
           <a:r>
-            <a:rPr lang="de-DE" sz="2500" b="0" kern="1200" dirty="0"/>
+            <a:rPr lang="de-DE" sz="2800" b="0" kern="1200" dirty="0"/>
             <a:t>Finetuning</a:t>
           </a:r>
-          <a:endParaRPr lang="en-US" sz="2500" b="0" kern="1200" dirty="0"/>
+          <a:endParaRPr lang="en-US" sz="2800" b="0" kern="1200" dirty="0"/>
         </a:p>
       </dsp:txBody>
       <dsp:txXfrm>
-        <a:off x="0" y="2175669"/>
-        <a:ext cx="10515600" cy="543917"/>
-      </dsp:txXfrm>
-    </dsp:sp>
-    <dsp:sp modelId="{322460D7-6763-F646-87E9-10A1FE9FDC20}">
-      <dsp:nvSpPr>
-        <dsp:cNvPr id="0" name=""/>
-        <dsp:cNvSpPr/>
-      </dsp:nvSpPr>
-      <dsp:spPr>
-        <a:xfrm>
-          <a:off x="0" y="2719586"/>
-          <a:ext cx="10515600" cy="0"/>
-        </a:xfrm>
-        <a:prstGeom prst="line">
-          <a:avLst/>
-        </a:prstGeom>
-        <a:solidFill>
-          <a:schemeClr val="accent1">
-            <a:hueOff val="0"/>
-            <a:satOff val="0"/>
-            <a:lumOff val="0"/>
-            <a:alphaOff val="0"/>
-          </a:schemeClr>
-        </a:solidFill>
-        <a:ln w="19050" cap="flat" cmpd="sng" algn="ctr">
-          <a:solidFill>
-            <a:schemeClr val="accent1">
-              <a:hueOff val="0"/>
-              <a:satOff val="0"/>
-              <a:lumOff val="0"/>
-              <a:alphaOff val="0"/>
-            </a:schemeClr>
-          </a:solidFill>
-          <a:prstDash val="solid"/>
-          <a:miter lim="800000"/>
-        </a:ln>
-        <a:effectLst/>
-      </dsp:spPr>
-      <dsp:style>
-        <a:lnRef idx="2">
-          <a:scrgbClr r="0" g="0" b="0"/>
-        </a:lnRef>
-        <a:fillRef idx="1">
-          <a:scrgbClr r="0" g="0" b="0"/>
-        </a:fillRef>
-        <a:effectRef idx="0">
-          <a:scrgbClr r="0" g="0" b="0"/>
-        </a:effectRef>
-        <a:fontRef idx="minor">
-          <a:schemeClr val="lt1"/>
-        </a:fontRef>
-      </dsp:style>
-    </dsp:sp>
-    <dsp:sp modelId="{9B5DA0EB-3C02-EE40-A02E-5B28D39BEF31}">
-      <dsp:nvSpPr>
-        <dsp:cNvPr id="0" name=""/>
-        <dsp:cNvSpPr/>
-      </dsp:nvSpPr>
-      <dsp:spPr>
-        <a:xfrm>
-          <a:off x="0" y="2719586"/>
-          <a:ext cx="10515600" cy="543917"/>
-        </a:xfrm>
-        <a:prstGeom prst="rect">
-          <a:avLst/>
-        </a:prstGeom>
-        <a:noFill/>
-        <a:ln>
-          <a:noFill/>
-        </a:ln>
-        <a:effectLst/>
-      </dsp:spPr>
-      <dsp:style>
-        <a:lnRef idx="0">
-          <a:scrgbClr r="0" g="0" b="0"/>
-        </a:lnRef>
-        <a:fillRef idx="0">
-          <a:scrgbClr r="0" g="0" b="0"/>
-        </a:fillRef>
-        <a:effectRef idx="0">
-          <a:scrgbClr r="0" g="0" b="0"/>
-        </a:effectRef>
-        <a:fontRef idx="minor"/>
-      </dsp:style>
-      <dsp:txBody>
-        <a:bodyPr spcFirstLastPara="0" vert="horz" wrap="square" lIns="95250" tIns="95250" rIns="95250" bIns="95250" numCol="1" spcCol="1270" anchor="t" anchorCtr="0">
-          <a:noAutofit/>
-        </a:bodyPr>
-        <a:lstStyle/>
-        <a:p>
-          <a:pPr marL="0" lvl="0" indent="0" algn="l" defTabSz="1111250">
-            <a:lnSpc>
-              <a:spcPct val="90000"/>
-            </a:lnSpc>
-            <a:spcBef>
-              <a:spcPct val="0"/>
-            </a:spcBef>
-            <a:spcAft>
-              <a:spcPct val="35000"/>
-            </a:spcAft>
-            <a:buNone/>
-          </a:pPr>
-          <a:r>
-            <a:rPr lang="en-US" sz="2500" b="0" kern="1200" dirty="0"/>
-            <a:t>Instruction Tuning</a:t>
-          </a:r>
-        </a:p>
-      </dsp:txBody>
-      <dsp:txXfrm>
-        <a:off x="0" y="2719586"/>
-        <a:ext cx="10515600" cy="543917"/>
+        <a:off x="0" y="2486402"/>
+        <a:ext cx="10515600" cy="621467"/>
       </dsp:txXfrm>
     </dsp:sp>
     <dsp:sp modelId="{3D5DC94A-13EE-9348-AB63-BA6D7AB77EF3}">
@@ -2066,7 +1898,7 @@
       </dsp:nvSpPr>
       <dsp:spPr>
         <a:xfrm>
-          <a:off x="0" y="3263503"/>
+          <a:off x="0" y="3107870"/>
           <a:ext cx="10515600" cy="0"/>
         </a:xfrm>
         <a:prstGeom prst="line">
@@ -2116,8 +1948,8 @@
       </dsp:nvSpPr>
       <dsp:spPr>
         <a:xfrm>
-          <a:off x="0" y="3263503"/>
-          <a:ext cx="10515600" cy="543917"/>
+          <a:off x="0" y="3107870"/>
+          <a:ext cx="10515600" cy="621467"/>
         </a:xfrm>
         <a:prstGeom prst="rect">
           <a:avLst/>
@@ -2141,12 +1973,12 @@
         <a:fontRef idx="minor"/>
       </dsp:style>
       <dsp:txBody>
-        <a:bodyPr spcFirstLastPara="0" vert="horz" wrap="square" lIns="95250" tIns="95250" rIns="95250" bIns="95250" numCol="1" spcCol="1270" anchor="t" anchorCtr="0">
+        <a:bodyPr spcFirstLastPara="0" vert="horz" wrap="square" lIns="106680" tIns="106680" rIns="106680" bIns="106680" numCol="1" spcCol="1270" anchor="t" anchorCtr="0">
           <a:noAutofit/>
         </a:bodyPr>
         <a:lstStyle/>
         <a:p>
-          <a:pPr marL="0" lvl="0" indent="0" algn="l" defTabSz="1111250">
+          <a:pPr marL="0" lvl="0" indent="0" algn="l" defTabSz="1244600">
             <a:lnSpc>
               <a:spcPct val="90000"/>
             </a:lnSpc>
@@ -2159,15 +1991,15 @@
             <a:buNone/>
           </a:pPr>
           <a:r>
-            <a:rPr lang="de-DE" sz="2500" b="1" kern="1200" dirty="0" err="1"/>
+            <a:rPr lang="de-DE" sz="2800" b="1" kern="1200" dirty="0" err="1"/>
             <a:t>Agents</a:t>
           </a:r>
-          <a:endParaRPr lang="en-US" sz="2500" b="1" kern="1200" dirty="0"/>
+          <a:endParaRPr lang="en-US" sz="2800" b="1" kern="1200" dirty="0"/>
         </a:p>
       </dsp:txBody>
       <dsp:txXfrm>
-        <a:off x="0" y="3263503"/>
-        <a:ext cx="10515600" cy="543917"/>
+        <a:off x="0" y="3107870"/>
+        <a:ext cx="10515600" cy="621467"/>
       </dsp:txXfrm>
     </dsp:sp>
     <dsp:sp modelId="{20D72B1E-AD82-9E49-86D8-09A4DD4D6212}">
@@ -2177,7 +2009,7 @@
       </dsp:nvSpPr>
       <dsp:spPr>
         <a:xfrm>
-          <a:off x="0" y="3807420"/>
+          <a:off x="0" y="3729338"/>
           <a:ext cx="10515600" cy="0"/>
         </a:xfrm>
         <a:prstGeom prst="line">
@@ -2227,8 +2059,8 @@
       </dsp:nvSpPr>
       <dsp:spPr>
         <a:xfrm>
-          <a:off x="0" y="3807420"/>
-          <a:ext cx="10515600" cy="543917"/>
+          <a:off x="0" y="3729338"/>
+          <a:ext cx="10515600" cy="621467"/>
         </a:xfrm>
         <a:prstGeom prst="rect">
           <a:avLst/>
@@ -2252,12 +2084,12 @@
         <a:fontRef idx="minor"/>
       </dsp:style>
       <dsp:txBody>
-        <a:bodyPr spcFirstLastPara="0" vert="horz" wrap="square" lIns="95250" tIns="95250" rIns="95250" bIns="95250" numCol="1" spcCol="1270" anchor="t" anchorCtr="0">
+        <a:bodyPr spcFirstLastPara="0" vert="horz" wrap="square" lIns="106680" tIns="106680" rIns="106680" bIns="106680" numCol="1" spcCol="1270" anchor="t" anchorCtr="0">
           <a:noAutofit/>
         </a:bodyPr>
         <a:lstStyle/>
         <a:p>
-          <a:pPr marL="0" lvl="0" indent="0" algn="l" defTabSz="1111250">
+          <a:pPr marL="0" lvl="0" indent="0" algn="l" defTabSz="1244600">
             <a:lnSpc>
               <a:spcPct val="90000"/>
             </a:lnSpc>
@@ -2270,15 +2102,15 @@
             <a:buNone/>
           </a:pPr>
           <a:r>
-            <a:rPr lang="de-DE" sz="2500" b="0" kern="1200" dirty="0"/>
+            <a:rPr lang="de-DE" sz="2800" b="0" kern="1200" dirty="0"/>
             <a:t>The Bigger Picture</a:t>
           </a:r>
-          <a:endParaRPr lang="en-US" sz="2500" b="0" kern="1200" dirty="0"/>
+          <a:endParaRPr lang="en-US" sz="2800" b="0" kern="1200" dirty="0"/>
         </a:p>
       </dsp:txBody>
       <dsp:txXfrm>
-        <a:off x="0" y="3807420"/>
-        <a:ext cx="10515600" cy="543917"/>
+        <a:off x="0" y="3729338"/>
+        <a:ext cx="10515600" cy="621467"/>
       </dsp:txXfrm>
     </dsp:sp>
   </dsp:spTree>
@@ -3867,7 +3699,7 @@
           <a:p>
             <a:fld id="{BD87B4AA-1AD3-B645-8C46-4DD33D66A771}" type="datetimeFigureOut">
               <a:rPr lang="de-DE" smtClean="0"/>
-              <a:t>09.09.25</a:t>
+              <a:t>12.09.25</a:t>
             </a:fld>
             <a:endParaRPr lang="de-DE"/>
           </a:p>
@@ -4281,7 +4113,7 @@
           <a:p>
             <a:fld id="{A40820F7-6C91-3C46-AB35-1A00849882C2}" type="datetime1">
               <a:rPr lang="de-DE" smtClean="0"/>
-              <a:t>09.09.25</a:t>
+              <a:t>12.09.25</a:t>
             </a:fld>
             <a:endParaRPr lang="de-DE"/>
           </a:p>
@@ -4479,7 +4311,7 @@
           <a:p>
             <a:fld id="{EF0C22EE-8BC1-4F47-9F25-6E6DC0837CD0}" type="datetime1">
               <a:rPr lang="de-DE" smtClean="0"/>
-              <a:t>09.09.25</a:t>
+              <a:t>12.09.25</a:t>
             </a:fld>
             <a:endParaRPr lang="de-DE"/>
           </a:p>
@@ -4687,7 +4519,7 @@
           <a:p>
             <a:fld id="{BF6F7086-E239-CB4C-AE08-764D923FF446}" type="datetime1">
               <a:rPr lang="de-DE" smtClean="0"/>
-              <a:t>09.09.25</a:t>
+              <a:t>12.09.25</a:t>
             </a:fld>
             <a:endParaRPr lang="de-DE"/>
           </a:p>
@@ -4885,7 +4717,7 @@
           <a:p>
             <a:fld id="{7613D0D4-D4D8-A942-9E01-A0F3487CA2AE}" type="datetime1">
               <a:rPr lang="de-DE" smtClean="0"/>
-              <a:t>09.09.25</a:t>
+              <a:t>12.09.25</a:t>
             </a:fld>
             <a:endParaRPr lang="de-DE"/>
           </a:p>
@@ -5160,7 +4992,7 @@
           <a:p>
             <a:fld id="{EF46364B-D759-F14C-A18A-77E1D17B19D4}" type="datetime1">
               <a:rPr lang="de-DE" smtClean="0"/>
-              <a:t>09.09.25</a:t>
+              <a:t>12.09.25</a:t>
             </a:fld>
             <a:endParaRPr lang="de-DE"/>
           </a:p>
@@ -5425,7 +5257,7 @@
           <a:p>
             <a:fld id="{2F2646AF-F89F-2E4E-92DF-9EEE6DD3C59D}" type="datetime1">
               <a:rPr lang="de-DE" smtClean="0"/>
-              <a:t>09.09.25</a:t>
+              <a:t>12.09.25</a:t>
             </a:fld>
             <a:endParaRPr lang="de-DE"/>
           </a:p>
@@ -5837,7 +5669,7 @@
           <a:p>
             <a:fld id="{8BBAE3CD-AF3C-CB44-B965-65B6EC4247CF}" type="datetime1">
               <a:rPr lang="de-DE" smtClean="0"/>
-              <a:t>09.09.25</a:t>
+              <a:t>12.09.25</a:t>
             </a:fld>
             <a:endParaRPr lang="de-DE"/>
           </a:p>
@@ -5978,7 +5810,7 @@
           <a:p>
             <a:fld id="{1CD7B66C-CFE0-CA4E-9046-939F1A7C2E41}" type="datetime1">
               <a:rPr lang="de-DE" smtClean="0"/>
-              <a:t>09.09.25</a:t>
+              <a:t>12.09.25</a:t>
             </a:fld>
             <a:endParaRPr lang="de-DE"/>
           </a:p>
@@ -6091,7 +5923,7 @@
           <a:p>
             <a:fld id="{5CD2A422-F575-E249-A0DB-51723ECD1D10}" type="datetime1">
               <a:rPr lang="de-DE" smtClean="0"/>
-              <a:t>09.09.25</a:t>
+              <a:t>12.09.25</a:t>
             </a:fld>
             <a:endParaRPr lang="de-DE"/>
           </a:p>
@@ -6402,7 +6234,7 @@
           <a:p>
             <a:fld id="{550C53E8-F479-1249-A1B6-5903063FF698}" type="datetime1">
               <a:rPr lang="de-DE" smtClean="0"/>
-              <a:t>09.09.25</a:t>
+              <a:t>12.09.25</a:t>
             </a:fld>
             <a:endParaRPr lang="de-DE"/>
           </a:p>
@@ -6690,7 +6522,7 @@
           <a:p>
             <a:fld id="{371E5EAB-7032-2B41-ACE6-C364C7875874}" type="datetime1">
               <a:rPr lang="de-DE" smtClean="0"/>
-              <a:t>09.09.25</a:t>
+              <a:t>12.09.25</a:t>
             </a:fld>
             <a:endParaRPr lang="de-DE"/>
           </a:p>
@@ -6931,7 +6763,7 @@
           <a:p>
             <a:fld id="{7F5E179E-33AE-1B4B-8EB8-E924F1C7104A}" type="datetime1">
               <a:rPr lang="de-DE" smtClean="0"/>
-              <a:t>09.09.25</a:t>
+              <a:t>12.09.25</a:t>
             </a:fld>
             <a:endParaRPr lang="de-DE"/>
           </a:p>
@@ -10179,7 +10011,7 @@
             <p:ph idx="1"/>
             <p:extLst>
               <p:ext uri="{D42A27DB-BD31-4B8C-83A1-F6EECF244321}">
-                <p14:modId xmlns:p14="http://schemas.microsoft.com/office/powerpoint/2010/main" val="2020605292"/>
+                <p14:modId xmlns:p14="http://schemas.microsoft.com/office/powerpoint/2010/main" val="2241600454"/>
               </p:ext>
             </p:extLst>
           </p:nvPr>

--- a/slides/6_agents.pptx
+++ b/slides/6_agents.pptx
@@ -5,7 +5,7 @@
     <p:sldMasterId id="2147483648" r:id="rId1"/>
   </p:sldMasterIdLst>
   <p:notesMasterIdLst>
-    <p:notesMasterId r:id="rId22"/>
+    <p:notesMasterId r:id="rId19"/>
   </p:notesMasterIdLst>
   <p:sldIdLst>
     <p:sldId id="256" r:id="rId2"/>
@@ -18,16 +18,13 @@
     <p:sldId id="824" r:id="rId9"/>
     <p:sldId id="832" r:id="rId10"/>
     <p:sldId id="803" r:id="rId11"/>
-    <p:sldId id="828" r:id="rId12"/>
-    <p:sldId id="827" r:id="rId13"/>
-    <p:sldId id="829" r:id="rId14"/>
-    <p:sldId id="830" r:id="rId15"/>
-    <p:sldId id="818" r:id="rId16"/>
-    <p:sldId id="834" r:id="rId17"/>
-    <p:sldId id="826" r:id="rId18"/>
-    <p:sldId id="833" r:id="rId19"/>
-    <p:sldId id="812" r:id="rId20"/>
-    <p:sldId id="811" r:id="rId21"/>
+    <p:sldId id="827" r:id="rId12"/>
+    <p:sldId id="818" r:id="rId13"/>
+    <p:sldId id="834" r:id="rId14"/>
+    <p:sldId id="826" r:id="rId15"/>
+    <p:sldId id="833" r:id="rId16"/>
+    <p:sldId id="812" r:id="rId17"/>
+    <p:sldId id="811" r:id="rId18"/>
   </p:sldIdLst>
   <p:sldSz cx="12192000" cy="6858000"/>
   <p:notesSz cx="6858000" cy="9144000"/>
@@ -3699,7 +3696,7 @@
           <a:p>
             <a:fld id="{BD87B4AA-1AD3-B645-8C46-4DD33D66A771}" type="datetimeFigureOut">
               <a:rPr lang="de-DE" smtClean="0"/>
-              <a:t>12.09.25</a:t>
+              <a:t>17.09.25</a:t>
             </a:fld>
             <a:endParaRPr lang="de-DE"/>
           </a:p>
@@ -4113,7 +4110,7 @@
           <a:p>
             <a:fld id="{A40820F7-6C91-3C46-AB35-1A00849882C2}" type="datetime1">
               <a:rPr lang="de-DE" smtClean="0"/>
-              <a:t>12.09.25</a:t>
+              <a:t>17.09.25</a:t>
             </a:fld>
             <a:endParaRPr lang="de-DE"/>
           </a:p>
@@ -4311,7 +4308,7 @@
           <a:p>
             <a:fld id="{EF0C22EE-8BC1-4F47-9F25-6E6DC0837CD0}" type="datetime1">
               <a:rPr lang="de-DE" smtClean="0"/>
-              <a:t>12.09.25</a:t>
+              <a:t>17.09.25</a:t>
             </a:fld>
             <a:endParaRPr lang="de-DE"/>
           </a:p>
@@ -4519,7 +4516,7 @@
           <a:p>
             <a:fld id="{BF6F7086-E239-CB4C-AE08-764D923FF446}" type="datetime1">
               <a:rPr lang="de-DE" smtClean="0"/>
-              <a:t>12.09.25</a:t>
+              <a:t>17.09.25</a:t>
             </a:fld>
             <a:endParaRPr lang="de-DE"/>
           </a:p>
@@ -4717,7 +4714,7 @@
           <a:p>
             <a:fld id="{7613D0D4-D4D8-A942-9E01-A0F3487CA2AE}" type="datetime1">
               <a:rPr lang="de-DE" smtClean="0"/>
-              <a:t>12.09.25</a:t>
+              <a:t>17.09.25</a:t>
             </a:fld>
             <a:endParaRPr lang="de-DE"/>
           </a:p>
@@ -4992,7 +4989,7 @@
           <a:p>
             <a:fld id="{EF46364B-D759-F14C-A18A-77E1D17B19D4}" type="datetime1">
               <a:rPr lang="de-DE" smtClean="0"/>
-              <a:t>12.09.25</a:t>
+              <a:t>17.09.25</a:t>
             </a:fld>
             <a:endParaRPr lang="de-DE"/>
           </a:p>
@@ -5257,7 +5254,7 @@
           <a:p>
             <a:fld id="{2F2646AF-F89F-2E4E-92DF-9EEE6DD3C59D}" type="datetime1">
               <a:rPr lang="de-DE" smtClean="0"/>
-              <a:t>12.09.25</a:t>
+              <a:t>17.09.25</a:t>
             </a:fld>
             <a:endParaRPr lang="de-DE"/>
           </a:p>
@@ -5669,7 +5666,7 @@
           <a:p>
             <a:fld id="{8BBAE3CD-AF3C-CB44-B965-65B6EC4247CF}" type="datetime1">
               <a:rPr lang="de-DE" smtClean="0"/>
-              <a:t>12.09.25</a:t>
+              <a:t>17.09.25</a:t>
             </a:fld>
             <a:endParaRPr lang="de-DE"/>
           </a:p>
@@ -5810,7 +5807,7 @@
           <a:p>
             <a:fld id="{1CD7B66C-CFE0-CA4E-9046-939F1A7C2E41}" type="datetime1">
               <a:rPr lang="de-DE" smtClean="0"/>
-              <a:t>12.09.25</a:t>
+              <a:t>17.09.25</a:t>
             </a:fld>
             <a:endParaRPr lang="de-DE"/>
           </a:p>
@@ -5923,7 +5920,7 @@
           <a:p>
             <a:fld id="{5CD2A422-F575-E249-A0DB-51723ECD1D10}" type="datetime1">
               <a:rPr lang="de-DE" smtClean="0"/>
-              <a:t>12.09.25</a:t>
+              <a:t>17.09.25</a:t>
             </a:fld>
             <a:endParaRPr lang="de-DE"/>
           </a:p>
@@ -6234,7 +6231,7 @@
           <a:p>
             <a:fld id="{550C53E8-F479-1249-A1B6-5903063FF698}" type="datetime1">
               <a:rPr lang="de-DE" smtClean="0"/>
-              <a:t>12.09.25</a:t>
+              <a:t>17.09.25</a:t>
             </a:fld>
             <a:endParaRPr lang="de-DE"/>
           </a:p>
@@ -6522,7 +6519,7 @@
           <a:p>
             <a:fld id="{371E5EAB-7032-2B41-ACE6-C364C7875874}" type="datetime1">
               <a:rPr lang="de-DE" smtClean="0"/>
-              <a:t>12.09.25</a:t>
+              <a:t>17.09.25</a:t>
             </a:fld>
             <a:endParaRPr lang="de-DE"/>
           </a:p>
@@ -6763,7 +6760,7 @@
           <a:p>
             <a:fld id="{7F5E179E-33AE-1B4B-8EB8-E924F1C7104A}" type="datetime1">
               <a:rPr lang="de-DE" smtClean="0"/>
-              <a:t>12.09.25</a:t>
+              <a:t>17.09.25</a:t>
             </a:fld>
             <a:endParaRPr lang="de-DE"/>
           </a:p>
@@ -7290,16 +7287,12 @@
           <a:lstStyle/>
           <a:p>
             <a:r>
+              <a:rPr lang="de-DE" dirty="0"/>
+              <a:t>Test-Time </a:t>
+            </a:r>
+            <a:r>
               <a:rPr lang="de-DE" dirty="0" err="1"/>
-              <a:t>Prompting</a:t>
-            </a:r>
-            <a:r>
-              <a:rPr lang="de-DE" dirty="0"/>
-              <a:t> </a:t>
-            </a:r>
-            <a:r>
-              <a:rPr lang="de-DE" dirty="0" err="1"/>
-              <a:t>Strategies</a:t>
+              <a:t>Scaling</a:t>
             </a:r>
             <a:endParaRPr lang="de-DE" dirty="0"/>
           </a:p>
@@ -7331,71 +7324,23 @@
             </a:pPr>
             <a:r>
               <a:rPr lang="en-GB" dirty="0"/>
-              <a:t>let LLM agents show reasoning capabilities by clever prompts</a:t>
-            </a:r>
-          </a:p>
-          <a:p>
+              <a:t>let LLM agents show reasoning capabilities by clever prompts (such as </a:t>
+            </a:r>
+            <a:r>
+              <a:rPr lang="en-GB" dirty="0" err="1">
+                <a:solidFill>
+                  <a:srgbClr val="212529"/>
+                </a:solidFill>
+              </a:rPr>
+              <a:t>CoT</a:t>
+            </a:r>
             <a:r>
               <a:rPr lang="en-GB" dirty="0">
                 <a:solidFill>
                   <a:srgbClr val="212529"/>
                 </a:solidFill>
               </a:rPr>
-              <a:t>… </a:t>
-            </a:r>
-            <a:r>
-              <a:rPr lang="en-GB" dirty="0">
-                <a:solidFill>
-                  <a:srgbClr val="212529"/>
-                </a:solidFill>
-                <a:hlinkClick r:id="rId2"/>
-              </a:rPr>
-              <a:t>chain-of-thought prompting</a:t>
-            </a:r>
-            <a:endParaRPr lang="en-GB" dirty="0">
-              <a:solidFill>
-                <a:srgbClr val="212529"/>
-              </a:solidFill>
-            </a:endParaRPr>
-          </a:p>
-          <a:p>
-            <a:r>
-              <a:rPr lang="en-GB" dirty="0">
-                <a:solidFill>
-                  <a:srgbClr val="212529"/>
-                </a:solidFill>
-              </a:rPr>
-              <a:t>… </a:t>
-            </a:r>
-            <a:r>
-              <a:rPr lang="en-GB" dirty="0">
-                <a:solidFill>
-                  <a:srgbClr val="212529"/>
-                </a:solidFill>
-                <a:hlinkClick r:id="rId3"/>
-              </a:rPr>
-              <a:t>ReAct</a:t>
-            </a:r>
-            <a:endParaRPr lang="en-GB" dirty="0">
-              <a:solidFill>
-                <a:srgbClr val="212529"/>
-              </a:solidFill>
-            </a:endParaRPr>
-          </a:p>
-          <a:p>
-            <a:r>
-              <a:rPr lang="en-GB" dirty="0"/>
-              <a:t>prompt optimization (</a:t>
-            </a:r>
-            <a:r>
-              <a:rPr lang="en-GB" dirty="0">
-                <a:hlinkClick r:id="rId4"/>
-              </a:rPr>
-              <a:t>OPRO</a:t>
-            </a:r>
-            <a:r>
-              <a:rPr lang="en-GB" dirty="0"/>
-              <a:t>)</a:t>
+              <a:t> or prompt optimization)</a:t>
             </a:r>
           </a:p>
           <a:p>
@@ -7421,6 +7366,118 @@
             <a:r>
               <a:rPr lang="de-DE" dirty="0" err="1"/>
               <a:t>scaling</a:t>
+            </a:r>
+            <a:r>
+              <a:rPr lang="de-DE" dirty="0"/>
+              <a:t>: </a:t>
+            </a:r>
+            <a:r>
+              <a:rPr lang="de-DE" dirty="0" err="1"/>
+              <a:t>the</a:t>
+            </a:r>
+            <a:r>
+              <a:rPr lang="de-DE" dirty="0"/>
+              <a:t> </a:t>
+            </a:r>
+            <a:r>
+              <a:rPr lang="de-DE" dirty="0" err="1"/>
+              <a:t>more</a:t>
+            </a:r>
+            <a:r>
+              <a:rPr lang="de-DE" dirty="0"/>
+              <a:t> </a:t>
+            </a:r>
+            <a:r>
+              <a:rPr lang="de-DE" dirty="0" err="1"/>
+              <a:t>thinking</a:t>
+            </a:r>
+            <a:r>
+              <a:rPr lang="de-DE" dirty="0"/>
+              <a:t> time (i.e., </a:t>
+            </a:r>
+            <a:r>
+              <a:rPr lang="de-DE" dirty="0" err="1"/>
+              <a:t>compute</a:t>
+            </a:r>
+            <a:r>
+              <a:rPr lang="de-DE" dirty="0"/>
+              <a:t>), </a:t>
+            </a:r>
+            <a:r>
+              <a:rPr lang="de-DE" dirty="0" err="1"/>
+              <a:t>the</a:t>
+            </a:r>
+            <a:r>
+              <a:rPr lang="de-DE" dirty="0"/>
+              <a:t> </a:t>
+            </a:r>
+            <a:r>
+              <a:rPr lang="de-DE" dirty="0" err="1"/>
+              <a:t>better</a:t>
+            </a:r>
+            <a:r>
+              <a:rPr lang="de-DE" dirty="0"/>
+              <a:t> </a:t>
+            </a:r>
+            <a:r>
+              <a:rPr lang="de-DE" dirty="0" err="1"/>
+              <a:t>the</a:t>
+            </a:r>
+            <a:r>
+              <a:rPr lang="de-DE" dirty="0"/>
+              <a:t> </a:t>
+            </a:r>
+            <a:r>
+              <a:rPr lang="de-DE" dirty="0" err="1"/>
+              <a:t>performance</a:t>
+            </a:r>
+            <a:r>
+              <a:rPr lang="de-DE" dirty="0"/>
+              <a:t> </a:t>
+            </a:r>
+            <a:r>
+              <a:rPr lang="de-DE" dirty="0" err="1"/>
+              <a:t>for</a:t>
+            </a:r>
+            <a:r>
+              <a:rPr lang="de-DE" dirty="0"/>
+              <a:t> </a:t>
+            </a:r>
+            <a:r>
+              <a:rPr lang="de-DE" dirty="0" err="1"/>
+              <a:t>most</a:t>
+            </a:r>
+            <a:r>
+              <a:rPr lang="de-DE" dirty="0"/>
+              <a:t> </a:t>
+            </a:r>
+            <a:r>
+              <a:rPr lang="de-DE" dirty="0" err="1"/>
+              <a:t>of</a:t>
+            </a:r>
+            <a:r>
+              <a:rPr lang="de-DE" dirty="0"/>
+              <a:t> </a:t>
+            </a:r>
+            <a:r>
+              <a:rPr lang="de-DE" dirty="0" err="1"/>
+              <a:t>the</a:t>
+            </a:r>
+            <a:r>
+              <a:rPr lang="de-DE" dirty="0"/>
+              <a:t> </a:t>
+            </a:r>
+            <a:r>
+              <a:rPr lang="de-DE" dirty="0" err="1"/>
+              <a:t>reasoning</a:t>
+            </a:r>
+            <a:r>
+              <a:rPr lang="de-DE" dirty="0"/>
+              <a:t> </a:t>
+            </a:r>
+            <a:r>
+              <a:rPr lang="de-DE" dirty="0" err="1"/>
+              <a:t>models</a:t>
             </a:r>
             <a:endParaRPr lang="de-DE" dirty="0"/>
           </a:p>
@@ -7490,7 +7547,7 @@
           <p:cNvPr id="2" name="Titel 1">
             <a:extLst>
               <a:ext uri="{FF2B5EF4-FFF2-40B4-BE49-F238E27FC236}">
-                <a16:creationId xmlns:a16="http://schemas.microsoft.com/office/drawing/2014/main" id="{7A7318C8-73B9-EC43-542B-973C6D5D79C6}"/>
+                <a16:creationId xmlns:a16="http://schemas.microsoft.com/office/drawing/2014/main" id="{3B0CEEA0-8B29-3C1D-D0C6-FC1028591C30}"/>
               </a:ext>
             </a:extLst>
           </p:cNvPr>
@@ -7507,20 +7564,10 @@
           <a:lstStyle/>
           <a:p>
             <a:r>
-              <a:rPr lang="de-DE" dirty="0"/>
-              <a:t>Chain-</a:t>
-            </a:r>
-            <a:r>
-              <a:rPr lang="de-DE" dirty="0" err="1"/>
-              <a:t>of</a:t>
-            </a:r>
-            <a:r>
-              <a:rPr lang="de-DE" dirty="0"/>
-              <a:t>-</a:t>
-            </a:r>
-            <a:r>
-              <a:rPr lang="de-DE" dirty="0" err="1"/>
-              <a:t>Thought</a:t>
+              <a:rPr lang="de-DE" dirty="0" err="1">
+                <a:hlinkClick r:id="rId2"/>
+              </a:rPr>
+              <a:t>ReAct</a:t>
             </a:r>
             <a:endParaRPr lang="de-DE" dirty="0"/>
           </a:p>
@@ -7531,7 +7578,7 @@
           <p:cNvPr id="3" name="Inhaltsplatzhalter 2">
             <a:extLst>
               <a:ext uri="{FF2B5EF4-FFF2-40B4-BE49-F238E27FC236}">
-                <a16:creationId xmlns:a16="http://schemas.microsoft.com/office/drawing/2014/main" id="{B7423DBD-2794-C31A-80DB-8E96FCD1EB25}"/>
+                <a16:creationId xmlns:a16="http://schemas.microsoft.com/office/drawing/2014/main" id="{22E4A5B7-F54B-4BB6-7F6A-6CFDE25BA092}"/>
               </a:ext>
             </a:extLst>
           </p:cNvPr>
@@ -7556,7 +7603,7 @@
           <p:cNvPr id="4" name="Foliennummernplatzhalter 3">
             <a:extLst>
               <a:ext uri="{FF2B5EF4-FFF2-40B4-BE49-F238E27FC236}">
-                <a16:creationId xmlns:a16="http://schemas.microsoft.com/office/drawing/2014/main" id="{EF3817CB-7601-B6C0-8EE5-823BC42E12A2}"/>
+                <a16:creationId xmlns:a16="http://schemas.microsoft.com/office/drawing/2014/main" id="{7821C98F-0DA1-1BC2-0CB9-BCBEFCA8821B}"/>
               </a:ext>
             </a:extLst>
           </p:cNvPr>
@@ -7583,7 +7630,7 @@
     </p:spTree>
     <p:extLst>
       <p:ext uri="{BB962C8B-B14F-4D97-AF65-F5344CB8AC3E}">
-        <p14:creationId xmlns:p14="http://schemas.microsoft.com/office/powerpoint/2010/main" val="1309836425"/>
+        <p14:creationId xmlns:p14="http://schemas.microsoft.com/office/powerpoint/2010/main" val="1160067683"/>
       </p:ext>
     </p:extLst>
   </p:cSld>
@@ -7615,7 +7662,7 @@
           <p:cNvPr id="2" name="Titel 1">
             <a:extLst>
               <a:ext uri="{FF2B5EF4-FFF2-40B4-BE49-F238E27FC236}">
-                <a16:creationId xmlns:a16="http://schemas.microsoft.com/office/drawing/2014/main" id="{3B0CEEA0-8B29-3C1D-D0C6-FC1028591C30}"/>
+                <a16:creationId xmlns:a16="http://schemas.microsoft.com/office/drawing/2014/main" id="{A91C5D31-09E7-37D3-7B4B-64D7BF2DF458}"/>
               </a:ext>
             </a:extLst>
           </p:cNvPr>
@@ -7633,9 +7680,12 @@
           <a:p>
             <a:r>
               <a:rPr lang="de-DE" dirty="0" err="1"/>
-              <a:t>ReAct</a:t>
-            </a:r>
-            <a:endParaRPr lang="de-DE" dirty="0"/>
+              <a:t>Reasoning</a:t>
+            </a:r>
+            <a:r>
+              <a:rPr lang="de-DE" dirty="0"/>
+              <a:t> Models</a:t>
+            </a:r>
           </a:p>
         </p:txBody>
       </p:sp>
@@ -7644,7 +7694,7 @@
           <p:cNvPr id="3" name="Inhaltsplatzhalter 2">
             <a:extLst>
               <a:ext uri="{FF2B5EF4-FFF2-40B4-BE49-F238E27FC236}">
-                <a16:creationId xmlns:a16="http://schemas.microsoft.com/office/drawing/2014/main" id="{22E4A5B7-F54B-4BB6-7F6A-6CFDE25BA092}"/>
+                <a16:creationId xmlns:a16="http://schemas.microsoft.com/office/drawing/2014/main" id="{09836B4B-ECB5-59A6-0FED-B3140FC37E16}"/>
               </a:ext>
             </a:extLst>
           </p:cNvPr>
@@ -7660,7 +7710,104 @@
           <a:bodyPr/>
           <a:lstStyle/>
           <a:p>
-            <a:endParaRPr lang="de-DE"/>
+            <a:r>
+              <a:rPr lang="de-DE" dirty="0" err="1"/>
+              <a:t>finetuning</a:t>
+            </a:r>
+            <a:r>
+              <a:rPr lang="de-DE" dirty="0"/>
+              <a:t> </a:t>
+            </a:r>
+            <a:r>
+              <a:rPr lang="de-DE" dirty="0" err="1"/>
+              <a:t>to</a:t>
+            </a:r>
+            <a:r>
+              <a:rPr lang="de-DE" dirty="0"/>
+              <a:t> </a:t>
+            </a:r>
+            <a:r>
+              <a:rPr lang="de-DE" dirty="0" err="1"/>
+              <a:t>improve</a:t>
+            </a:r>
+            <a:r>
+              <a:rPr lang="de-DE" dirty="0"/>
+              <a:t> </a:t>
+            </a:r>
+            <a:r>
+              <a:rPr lang="de-DE" dirty="0" err="1"/>
+              <a:t>reasoning</a:t>
+            </a:r>
+            <a:r>
+              <a:rPr lang="de-DE" dirty="0"/>
+              <a:t> </a:t>
+            </a:r>
+            <a:r>
+              <a:rPr lang="de-DE" dirty="0" err="1"/>
+              <a:t>capabilities</a:t>
+            </a:r>
+            <a:r>
+              <a:rPr lang="de-DE" dirty="0"/>
+              <a:t> </a:t>
+            </a:r>
+            <a:r>
+              <a:rPr lang="de-DE" dirty="0" err="1"/>
+              <a:t>of</a:t>
+            </a:r>
+            <a:r>
+              <a:rPr lang="de-DE" dirty="0"/>
+              <a:t> LLMs</a:t>
+            </a:r>
+          </a:p>
+          <a:p>
+            <a:endParaRPr lang="de-DE" dirty="0"/>
+          </a:p>
+          <a:p>
+            <a:r>
+              <a:rPr lang="de-DE" dirty="0" err="1"/>
+              <a:t>explicitly</a:t>
+            </a:r>
+            <a:r>
+              <a:rPr lang="de-DE" dirty="0"/>
+              <a:t> </a:t>
+            </a:r>
+            <a:r>
+              <a:rPr lang="de-DE" dirty="0" err="1"/>
+              <a:t>trained</a:t>
+            </a:r>
+            <a:r>
+              <a:rPr lang="de-DE" dirty="0"/>
+              <a:t> </a:t>
+            </a:r>
+            <a:r>
+              <a:rPr lang="de-DE" dirty="0" err="1"/>
+              <a:t>to</a:t>
+            </a:r>
+            <a:r>
+              <a:rPr lang="de-DE" dirty="0"/>
+              <a:t> perform native </a:t>
+            </a:r>
+            <a:r>
+              <a:rPr lang="de-DE" dirty="0" err="1"/>
+              <a:t>thinking</a:t>
+            </a:r>
+            <a:r>
+              <a:rPr lang="de-DE" dirty="0"/>
+              <a:t> </a:t>
+            </a:r>
+            <a:r>
+              <a:rPr lang="de-DE" dirty="0" err="1"/>
+              <a:t>or</a:t>
+            </a:r>
+            <a:r>
+              <a:rPr lang="de-DE" dirty="0"/>
+              <a:t> </a:t>
+            </a:r>
+            <a:r>
+              <a:rPr lang="de-DE" dirty="0" err="1"/>
+              <a:t>chain-of-thought</a:t>
+            </a:r>
+            <a:endParaRPr lang="de-DE" dirty="0"/>
           </a:p>
         </p:txBody>
       </p:sp>
@@ -7669,7 +7816,7 @@
           <p:cNvPr id="4" name="Foliennummernplatzhalter 3">
             <a:extLst>
               <a:ext uri="{FF2B5EF4-FFF2-40B4-BE49-F238E27FC236}">
-                <a16:creationId xmlns:a16="http://schemas.microsoft.com/office/drawing/2014/main" id="{7821C98F-0DA1-1BC2-0CB9-BCBEFCA8821B}"/>
+                <a16:creationId xmlns:a16="http://schemas.microsoft.com/office/drawing/2014/main" id="{3B650135-6F1E-0A6A-7FAD-339FF4010258}"/>
               </a:ext>
             </a:extLst>
           </p:cNvPr>
@@ -7696,7 +7843,7 @@
     </p:spTree>
     <p:extLst>
       <p:ext uri="{BB962C8B-B14F-4D97-AF65-F5344CB8AC3E}">
-        <p14:creationId xmlns:p14="http://schemas.microsoft.com/office/powerpoint/2010/main" val="1160067683"/>
+        <p14:creationId xmlns:p14="http://schemas.microsoft.com/office/powerpoint/2010/main" val="202159617"/>
       </p:ext>
     </p:extLst>
   </p:cSld>
@@ -7728,7 +7875,7 @@
           <p:cNvPr id="2" name="Titel 1">
             <a:extLst>
               <a:ext uri="{FF2B5EF4-FFF2-40B4-BE49-F238E27FC236}">
-                <a16:creationId xmlns:a16="http://schemas.microsoft.com/office/drawing/2014/main" id="{C15646C0-9DE6-1614-0D5F-7524EEA1A17B}"/>
+                <a16:creationId xmlns:a16="http://schemas.microsoft.com/office/drawing/2014/main" id="{466C20C4-5209-19D7-483A-98696C4679A6}"/>
               </a:ext>
             </a:extLst>
           </p:cNvPr>
@@ -7745,12 +7892,9 @@
           <a:lstStyle/>
           <a:p>
             <a:r>
-              <a:rPr lang="de-DE" dirty="0">
-                <a:hlinkClick r:id="rId2"/>
-              </a:rPr>
-              <a:t>OPRO</a:t>
-            </a:r>
-            <a:endParaRPr lang="de-DE" dirty="0"/>
+              <a:rPr lang="de-DE" dirty="0"/>
+              <a:t>Test-Time Training</a:t>
+            </a:r>
           </a:p>
         </p:txBody>
       </p:sp>
@@ -7759,7 +7903,7 @@
           <p:cNvPr id="3" name="Inhaltsplatzhalter 2">
             <a:extLst>
               <a:ext uri="{FF2B5EF4-FFF2-40B4-BE49-F238E27FC236}">
-                <a16:creationId xmlns:a16="http://schemas.microsoft.com/office/drawing/2014/main" id="{79EAFB34-87BB-A05E-1496-1D217F535301}"/>
+                <a16:creationId xmlns:a16="http://schemas.microsoft.com/office/drawing/2014/main" id="{C5BB78A2-9831-C082-306C-27212A8FF535}"/>
               </a:ext>
             </a:extLst>
           </p:cNvPr>
@@ -7776,6 +7920,24 @@
           <a:lstStyle/>
           <a:p>
             <a:r>
+              <a:rPr lang="de-DE" dirty="0">
+                <a:hlinkClick r:id="rId2"/>
+              </a:rPr>
+              <a:t>TTT</a:t>
+            </a:r>
+            <a:endParaRPr lang="de-DE" dirty="0"/>
+          </a:p>
+          <a:p>
+            <a:pPr marL="0" indent="0">
+              <a:buNone/>
+            </a:pPr>
+            <a:endParaRPr lang="de-DE" dirty="0"/>
+          </a:p>
+          <a:p>
+            <a:pPr marL="0" indent="0">
+              <a:buNone/>
+            </a:pPr>
+            <a:r>
               <a:rPr lang="de-DE" dirty="0"/>
               <a:t>…</a:t>
             </a:r>
@@ -7787,7 +7949,7 @@
           <p:cNvPr id="4" name="Foliennummernplatzhalter 3">
             <a:extLst>
               <a:ext uri="{FF2B5EF4-FFF2-40B4-BE49-F238E27FC236}">
-                <a16:creationId xmlns:a16="http://schemas.microsoft.com/office/drawing/2014/main" id="{A736A156-69CB-BD1E-116E-70E5767C6907}"/>
+                <a16:creationId xmlns:a16="http://schemas.microsoft.com/office/drawing/2014/main" id="{E0A53C98-BCF2-DF15-62E2-53F1B7EE2D64}"/>
               </a:ext>
             </a:extLst>
           </p:cNvPr>
@@ -7811,40 +7973,10 @@
           </a:p>
         </p:txBody>
       </p:sp>
-      <p:pic>
-        <p:nvPicPr>
-          <p:cNvPr id="6" name="Grafik 5" descr="Ein Bild, das Text, Screenshot, Schrift, Diagramm enthält.&#10;&#10;KI-generierte Inhalte können fehlerhaft sein.">
-            <a:extLst>
-              <a:ext uri="{FF2B5EF4-FFF2-40B4-BE49-F238E27FC236}">
-                <a16:creationId xmlns:a16="http://schemas.microsoft.com/office/drawing/2014/main" id="{FBAE8D1C-F934-A573-7E5F-4333C6290BCF}"/>
-              </a:ext>
-            </a:extLst>
-          </p:cNvPr>
-          <p:cNvPicPr>
-            <a:picLocks noChangeAspect="1"/>
-          </p:cNvPicPr>
-          <p:nvPr/>
-        </p:nvPicPr>
-        <p:blipFill>
-          <a:blip r:embed="rId3"/>
-          <a:stretch>
-            <a:fillRect/>
-          </a:stretch>
-        </p:blipFill>
-        <p:spPr>
-          <a:xfrm>
-            <a:off x="2209800" y="2454668"/>
-            <a:ext cx="7772400" cy="4266807"/>
-          </a:xfrm>
-          <a:prstGeom prst="rect">
-            <a:avLst/>
-          </a:prstGeom>
-        </p:spPr>
-      </p:pic>
     </p:spTree>
     <p:extLst>
       <p:ext uri="{BB962C8B-B14F-4D97-AF65-F5344CB8AC3E}">
-        <p14:creationId xmlns:p14="http://schemas.microsoft.com/office/powerpoint/2010/main" val="1233591244"/>
+        <p14:creationId xmlns:p14="http://schemas.microsoft.com/office/powerpoint/2010/main" val="3664914328"/>
       </p:ext>
     </p:extLst>
   </p:cSld>
@@ -7876,7 +8008,7 @@
           <p:cNvPr id="2" name="Titel 1">
             <a:extLst>
               <a:ext uri="{FF2B5EF4-FFF2-40B4-BE49-F238E27FC236}">
-                <a16:creationId xmlns:a16="http://schemas.microsoft.com/office/drawing/2014/main" id="{31C186D0-81C0-6D65-DD79-FFED278A1A88}"/>
+                <a16:creationId xmlns:a16="http://schemas.microsoft.com/office/drawing/2014/main" id="{B76BB335-B909-3481-F78C-2F6FA8F65992}"/>
               </a:ext>
             </a:extLst>
           </p:cNvPr>
@@ -7893,14 +8025,13 @@
           <a:lstStyle/>
           <a:p>
             <a:r>
-              <a:rPr lang="de-DE" dirty="0"/>
-              <a:t>Test-Time </a:t>
-            </a:r>
-            <a:r>
               <a:rPr lang="de-DE" dirty="0" err="1"/>
-              <a:t>Scaling</a:t>
-            </a:r>
-            <a:endParaRPr lang="de-DE" dirty="0"/>
+              <a:t>Agents</a:t>
+            </a:r>
+            <a:r>
+              <a:rPr lang="de-DE" dirty="0"/>
+              <a:t> and LLM Orchestration</a:t>
+            </a:r>
           </a:p>
         </p:txBody>
       </p:sp>
@@ -7909,7 +8040,7 @@
           <p:cNvPr id="3" name="Inhaltsplatzhalter 2">
             <a:extLst>
               <a:ext uri="{FF2B5EF4-FFF2-40B4-BE49-F238E27FC236}">
-                <a16:creationId xmlns:a16="http://schemas.microsoft.com/office/drawing/2014/main" id="{90E73D71-9010-09DA-2EB7-5F1CA7198069}"/>
+                <a16:creationId xmlns:a16="http://schemas.microsoft.com/office/drawing/2014/main" id="{D8B74722-F2FE-4CB7-44ED-EDB2E891B7F6}"/>
               </a:ext>
             </a:extLst>
           </p:cNvPr>
@@ -7922,132 +8053,345 @@
         </p:nvSpPr>
         <p:spPr/>
         <p:txBody>
-          <a:bodyPr/>
+          <a:bodyPr>
+            <a:normAutofit fontScale="92500"/>
+          </a:bodyPr>
           <a:lstStyle/>
-          <a:p>
-            <a:r>
-              <a:rPr lang="de-DE" dirty="0" err="1"/>
-              <a:t>the</a:t>
-            </a:r>
-            <a:r>
-              <a:rPr lang="de-DE" dirty="0"/>
-              <a:t> </a:t>
-            </a:r>
-            <a:r>
-              <a:rPr lang="de-DE" dirty="0" err="1"/>
-              <a:t>more</a:t>
-            </a:r>
-            <a:r>
-              <a:rPr lang="de-DE" dirty="0"/>
-              <a:t> </a:t>
-            </a:r>
-            <a:r>
-              <a:rPr lang="de-DE" dirty="0" err="1"/>
-              <a:t>thinking</a:t>
-            </a:r>
-            <a:r>
-              <a:rPr lang="de-DE" dirty="0"/>
-              <a:t> time (i.e., </a:t>
-            </a:r>
-            <a:r>
-              <a:rPr lang="de-DE" dirty="0" err="1"/>
-              <a:t>compute</a:t>
-            </a:r>
-            <a:r>
-              <a:rPr lang="de-DE" dirty="0"/>
-              <a:t>), </a:t>
-            </a:r>
-            <a:r>
-              <a:rPr lang="de-DE" dirty="0" err="1"/>
-              <a:t>the</a:t>
-            </a:r>
-            <a:r>
-              <a:rPr lang="de-DE" dirty="0"/>
-              <a:t> </a:t>
-            </a:r>
-            <a:r>
-              <a:rPr lang="de-DE" dirty="0" err="1"/>
-              <a:t>better</a:t>
-            </a:r>
-            <a:r>
-              <a:rPr lang="de-DE" dirty="0"/>
-              <a:t> </a:t>
-            </a:r>
-            <a:r>
-              <a:rPr lang="de-DE" dirty="0" err="1"/>
-              <a:t>the</a:t>
-            </a:r>
-            <a:r>
-              <a:rPr lang="de-DE" dirty="0"/>
-              <a:t> </a:t>
-            </a:r>
-            <a:r>
-              <a:rPr lang="de-DE" dirty="0" err="1"/>
-              <a:t>performance</a:t>
-            </a:r>
-            <a:r>
-              <a:rPr lang="de-DE" dirty="0"/>
-              <a:t> </a:t>
-            </a:r>
-            <a:r>
-              <a:rPr lang="de-DE" dirty="0" err="1"/>
-              <a:t>for</a:t>
-            </a:r>
-            <a:r>
-              <a:rPr lang="de-DE" dirty="0"/>
-              <a:t> </a:t>
-            </a:r>
-            <a:r>
-              <a:rPr lang="de-DE" dirty="0" err="1"/>
-              <a:t>most</a:t>
-            </a:r>
-            <a:r>
-              <a:rPr lang="de-DE" dirty="0"/>
-              <a:t> </a:t>
-            </a:r>
-            <a:r>
-              <a:rPr lang="de-DE" dirty="0" err="1"/>
-              <a:t>of</a:t>
-            </a:r>
-            <a:r>
-              <a:rPr lang="de-DE" dirty="0"/>
-              <a:t> </a:t>
-            </a:r>
-            <a:r>
-              <a:rPr lang="de-DE" dirty="0" err="1"/>
-              <a:t>the</a:t>
-            </a:r>
-            <a:r>
-              <a:rPr lang="de-DE" dirty="0"/>
-              <a:t> </a:t>
-            </a:r>
-            <a:r>
-              <a:rPr lang="de-DE" dirty="0" err="1"/>
-              <a:t>reasoning</a:t>
-            </a:r>
-            <a:r>
-              <a:rPr lang="de-DE" dirty="0"/>
-              <a:t> </a:t>
-            </a:r>
-            <a:r>
-              <a:rPr lang="de-DE" dirty="0" err="1"/>
-              <a:t>models</a:t>
-            </a:r>
-            <a:endParaRPr lang="de-DE" dirty="0"/>
-          </a:p>
           <a:p>
             <a:pPr marL="0" indent="0">
               <a:buNone/>
             </a:pPr>
-            <a:endParaRPr lang="de-DE" dirty="0"/>
+            <a:r>
+              <a:rPr lang="de-DE" dirty="0" err="1"/>
+              <a:t>LangChain</a:t>
+            </a:r>
+            <a:r>
+              <a:rPr lang="de-DE" dirty="0"/>
+              <a:t>, </a:t>
+            </a:r>
+            <a:r>
+              <a:rPr lang="de-DE" dirty="0" err="1"/>
+              <a:t>AutoGPT</a:t>
+            </a:r>
+            <a:r>
+              <a:rPr lang="de-DE" dirty="0"/>
+              <a:t>, </a:t>
+            </a:r>
+            <a:r>
+              <a:rPr lang="de-DE" dirty="0" err="1"/>
+              <a:t>OpenAgents</a:t>
+            </a:r>
+            <a:r>
+              <a:rPr lang="de-DE" dirty="0"/>
+              <a:t>, </a:t>
+            </a:r>
+            <a:r>
+              <a:rPr lang="de-DE" dirty="0" err="1"/>
+              <a:t>BabyAGI</a:t>
+            </a:r>
+            <a:r>
+              <a:rPr lang="de-DE" dirty="0"/>
+              <a:t>, …</a:t>
+            </a:r>
           </a:p>
           <a:p>
             <a:pPr marL="0" indent="0">
               <a:buNone/>
             </a:pPr>
-            <a:r>
-              <a:rPr lang="de-DE" dirty="0"/>
-              <a:t>…</a:t>
+            <a:endParaRPr lang="de-DE" b="1" dirty="0"/>
+          </a:p>
+          <a:p>
+            <a:pPr marL="0" indent="0">
+              <a:buNone/>
+            </a:pPr>
+            <a:r>
+              <a:rPr lang="de-DE" b="1" dirty="0" err="1"/>
+              <a:t>prompting</a:t>
+            </a:r>
+            <a:r>
+              <a:rPr lang="de-DE" b="1" dirty="0"/>
+              <a:t> </a:t>
+            </a:r>
+            <a:r>
+              <a:rPr lang="de-DE" b="1" dirty="0" err="1"/>
+              <a:t>strategies</a:t>
+            </a:r>
+            <a:r>
+              <a:rPr lang="de-DE" b="1" dirty="0"/>
+              <a:t> + </a:t>
+            </a:r>
+            <a:r>
+              <a:rPr lang="de-DE" b="1" dirty="0" err="1"/>
+              <a:t>orchestration</a:t>
+            </a:r>
+            <a:r>
+              <a:rPr lang="de-DE" b="1" dirty="0"/>
+              <a:t> </a:t>
+            </a:r>
+            <a:r>
+              <a:rPr lang="de-DE" b="1" dirty="0" err="1"/>
+              <a:t>logic</a:t>
+            </a:r>
+            <a:r>
+              <a:rPr lang="de-DE" b="1" dirty="0"/>
+              <a:t> + </a:t>
+            </a:r>
+            <a:r>
+              <a:rPr lang="de-DE" b="1" dirty="0" err="1"/>
+              <a:t>access</a:t>
+            </a:r>
+            <a:r>
+              <a:rPr lang="de-DE" b="1" dirty="0"/>
+              <a:t> </a:t>
+            </a:r>
+            <a:r>
+              <a:rPr lang="de-DE" b="1" dirty="0" err="1"/>
+              <a:t>to</a:t>
+            </a:r>
+            <a:r>
+              <a:rPr lang="de-DE" b="1" dirty="0"/>
+              <a:t> </a:t>
+            </a:r>
+            <a:r>
+              <a:rPr lang="de-DE" b="1" dirty="0" err="1"/>
+              <a:t>tools</a:t>
+            </a:r>
+            <a:r>
+              <a:rPr lang="de-DE" b="1" dirty="0"/>
+              <a:t>/</a:t>
+            </a:r>
+            <a:r>
+              <a:rPr lang="de-DE" b="1" dirty="0" err="1"/>
+              <a:t>memory</a:t>
+            </a:r>
+            <a:r>
+              <a:rPr lang="de-DE" dirty="0"/>
+              <a:t> </a:t>
+            </a:r>
+            <a:br>
+              <a:rPr lang="de-DE" dirty="0"/>
+            </a:br>
+            <a:endParaRPr lang="de-DE" dirty="0"/>
+          </a:p>
+          <a:p>
+            <a:pPr marL="0" indent="0">
+              <a:buNone/>
+            </a:pPr>
+            <a:r>
+              <a:rPr lang="de-DE" dirty="0" err="1"/>
+              <a:t>They</a:t>
+            </a:r>
+            <a:r>
+              <a:rPr lang="de-DE" dirty="0"/>
+              <a:t> </a:t>
+            </a:r>
+            <a:r>
+              <a:rPr lang="de-DE" b="1" dirty="0" err="1"/>
+              <a:t>wrap</a:t>
+            </a:r>
+            <a:r>
+              <a:rPr lang="de-DE" dirty="0"/>
+              <a:t> an LLM (like GPT-4) in an </a:t>
+            </a:r>
+            <a:r>
+              <a:rPr lang="de-DE" dirty="0" err="1"/>
+              <a:t>architecture</a:t>
+            </a:r>
+            <a:r>
+              <a:rPr lang="de-DE" dirty="0"/>
+              <a:t> </a:t>
+            </a:r>
+            <a:r>
+              <a:rPr lang="de-DE" dirty="0" err="1"/>
+              <a:t>that</a:t>
+            </a:r>
+            <a:r>
+              <a:rPr lang="de-DE" dirty="0"/>
+              <a:t> </a:t>
+            </a:r>
+            <a:r>
+              <a:rPr lang="de-DE" dirty="0" err="1"/>
+              <a:t>allows</a:t>
+            </a:r>
+            <a:r>
+              <a:rPr lang="de-DE" dirty="0"/>
+              <a:t> </a:t>
+            </a:r>
+            <a:r>
+              <a:rPr lang="de-DE" dirty="0" err="1"/>
+              <a:t>it</a:t>
+            </a:r>
+            <a:r>
+              <a:rPr lang="de-DE" dirty="0"/>
+              <a:t> </a:t>
+            </a:r>
+            <a:r>
+              <a:rPr lang="de-DE" dirty="0" err="1"/>
+              <a:t>to</a:t>
+            </a:r>
+            <a:r>
+              <a:rPr lang="de-DE" dirty="0"/>
+              <a:t>:</a:t>
+            </a:r>
+          </a:p>
+          <a:p>
+            <a:r>
+              <a:rPr lang="de-DE" b="1" dirty="0"/>
+              <a:t>Prompt </a:t>
+            </a:r>
+            <a:r>
+              <a:rPr lang="de-DE" b="1" dirty="0" err="1"/>
+              <a:t>itself</a:t>
+            </a:r>
+            <a:r>
+              <a:rPr lang="de-DE" b="1" dirty="0"/>
+              <a:t> in a loop</a:t>
+            </a:r>
+            <a:r>
+              <a:rPr lang="de-DE" dirty="0"/>
+              <a:t> (</a:t>
+            </a:r>
+            <a:r>
+              <a:rPr lang="de-DE" dirty="0" err="1"/>
+              <a:t>self-reflect</a:t>
+            </a:r>
+            <a:r>
+              <a:rPr lang="de-DE" dirty="0"/>
+              <a:t>, plan, </a:t>
+            </a:r>
+            <a:r>
+              <a:rPr lang="de-DE" dirty="0" err="1"/>
+              <a:t>re</a:t>
+            </a:r>
+            <a:r>
+              <a:rPr lang="de-DE" dirty="0"/>
+              <a:t>-prompt).</a:t>
+            </a:r>
+          </a:p>
+          <a:p>
+            <a:r>
+              <a:rPr lang="de-DE" b="1" dirty="0" err="1"/>
+              <a:t>Persist</a:t>
+            </a:r>
+            <a:r>
+              <a:rPr lang="de-DE" b="1" dirty="0"/>
+              <a:t> </a:t>
+            </a:r>
+            <a:r>
+              <a:rPr lang="de-DE" b="1" dirty="0" err="1"/>
+              <a:t>state</a:t>
+            </a:r>
+            <a:r>
+              <a:rPr lang="de-DE" dirty="0"/>
+              <a:t> (via </a:t>
+            </a:r>
+            <a:r>
+              <a:rPr lang="de-DE" dirty="0" err="1"/>
+              <a:t>memory</a:t>
+            </a:r>
+            <a:r>
+              <a:rPr lang="de-DE" dirty="0"/>
+              <a:t>, </a:t>
+            </a:r>
+            <a:r>
+              <a:rPr lang="de-DE" dirty="0" err="1"/>
+              <a:t>databases</a:t>
+            </a:r>
+            <a:r>
+              <a:rPr lang="de-DE" dirty="0"/>
+              <a:t>).</a:t>
+            </a:r>
+          </a:p>
+          <a:p>
+            <a:r>
+              <a:rPr lang="de-DE" b="1" dirty="0"/>
+              <a:t>Call external </a:t>
+            </a:r>
+            <a:r>
+              <a:rPr lang="de-DE" b="1" dirty="0" err="1"/>
+              <a:t>tools</a:t>
+            </a:r>
+            <a:r>
+              <a:rPr lang="de-DE" b="1" dirty="0"/>
+              <a:t>/APIs</a:t>
+            </a:r>
+            <a:r>
+              <a:rPr lang="de-DE" dirty="0"/>
+              <a:t> (web </a:t>
+            </a:r>
+            <a:r>
+              <a:rPr lang="de-DE" dirty="0" err="1"/>
+              <a:t>search</a:t>
+            </a:r>
+            <a:r>
+              <a:rPr lang="de-DE" dirty="0"/>
+              <a:t>, code </a:t>
+            </a:r>
+            <a:r>
+              <a:rPr lang="de-DE" dirty="0" err="1"/>
+              <a:t>execution</a:t>
+            </a:r>
+            <a:r>
+              <a:rPr lang="de-DE" dirty="0"/>
+              <a:t>, </a:t>
+            </a:r>
+            <a:r>
+              <a:rPr lang="de-DE" dirty="0" err="1"/>
+              <a:t>file</a:t>
+            </a:r>
+            <a:r>
+              <a:rPr lang="de-DE" dirty="0"/>
+              <a:t> </a:t>
+            </a:r>
+            <a:r>
+              <a:rPr lang="de-DE" dirty="0" err="1"/>
+              <a:t>systems</a:t>
+            </a:r>
+            <a:r>
+              <a:rPr lang="de-DE" dirty="0"/>
+              <a:t>).</a:t>
+            </a:r>
+          </a:p>
+          <a:p>
+            <a:r>
+              <a:rPr lang="de-DE" b="1" dirty="0" err="1"/>
+              <a:t>Iteratively</a:t>
+            </a:r>
+            <a:r>
+              <a:rPr lang="de-DE" b="1" dirty="0"/>
+              <a:t> </a:t>
+            </a:r>
+            <a:r>
+              <a:rPr lang="de-DE" b="1" dirty="0" err="1"/>
+              <a:t>refine</a:t>
+            </a:r>
+            <a:r>
+              <a:rPr lang="de-DE" b="1" dirty="0"/>
+              <a:t> </a:t>
+            </a:r>
+            <a:r>
+              <a:rPr lang="de-DE" b="1" dirty="0" err="1"/>
+              <a:t>output</a:t>
+            </a:r>
+            <a:r>
+              <a:rPr lang="de-DE" dirty="0"/>
+              <a:t> </a:t>
+            </a:r>
+            <a:r>
+              <a:rPr lang="de-DE" dirty="0" err="1"/>
+              <a:t>toward</a:t>
+            </a:r>
+            <a:r>
+              <a:rPr lang="de-DE" dirty="0"/>
+              <a:t> a </a:t>
+            </a:r>
+            <a:r>
+              <a:rPr lang="de-DE" dirty="0" err="1"/>
+              <a:t>goal</a:t>
+            </a:r>
+            <a:r>
+              <a:rPr lang="de-DE" dirty="0"/>
+              <a:t>.</a:t>
             </a:r>
           </a:p>
         </p:txBody>
@@ -8057,7 +8401,7 @@
           <p:cNvPr id="4" name="Foliennummernplatzhalter 3">
             <a:extLst>
               <a:ext uri="{FF2B5EF4-FFF2-40B4-BE49-F238E27FC236}">
-                <a16:creationId xmlns:a16="http://schemas.microsoft.com/office/drawing/2014/main" id="{5D52094D-0E7C-4795-9CA0-BBEBEE72E72D}"/>
+                <a16:creationId xmlns:a16="http://schemas.microsoft.com/office/drawing/2014/main" id="{0868C356-CB0F-390F-3607-F244D67E92D3}"/>
               </a:ext>
             </a:extLst>
           </p:cNvPr>
@@ -8084,7 +8428,7 @@
     </p:spTree>
     <p:extLst>
       <p:ext uri="{BB962C8B-B14F-4D97-AF65-F5344CB8AC3E}">
-        <p14:creationId xmlns:p14="http://schemas.microsoft.com/office/powerpoint/2010/main" val="3865653356"/>
+        <p14:creationId xmlns:p14="http://schemas.microsoft.com/office/powerpoint/2010/main" val="2276534947"/>
       </p:ext>
     </p:extLst>
   </p:cSld>
@@ -8116,7 +8460,7 @@
           <p:cNvPr id="2" name="Titel 1">
             <a:extLst>
               <a:ext uri="{FF2B5EF4-FFF2-40B4-BE49-F238E27FC236}">
-                <a16:creationId xmlns:a16="http://schemas.microsoft.com/office/drawing/2014/main" id="{A91C5D31-09E7-37D3-7B4B-64D7BF2DF458}"/>
+                <a16:creationId xmlns:a16="http://schemas.microsoft.com/office/drawing/2014/main" id="{7A303D78-315B-F9C7-BAA4-AC1A14712C00}"/>
               </a:ext>
             </a:extLst>
           </p:cNvPr>
@@ -8133,12 +8477,8 @@
           <a:lstStyle/>
           <a:p>
             <a:r>
-              <a:rPr lang="de-DE" dirty="0" err="1"/>
-              <a:t>Reasoning</a:t>
-            </a:r>
-            <a:r>
-              <a:rPr lang="de-DE" dirty="0"/>
-              <a:t> Models</a:t>
+              <a:rPr lang="de-DE" dirty="0"/>
+              <a:t>Structured Outputs</a:t>
             </a:r>
           </a:p>
         </p:txBody>
@@ -8148,7 +8488,7 @@
           <p:cNvPr id="3" name="Inhaltsplatzhalter 2">
             <a:extLst>
               <a:ext uri="{FF2B5EF4-FFF2-40B4-BE49-F238E27FC236}">
-                <a16:creationId xmlns:a16="http://schemas.microsoft.com/office/drawing/2014/main" id="{09836B4B-ECB5-59A6-0FED-B3140FC37E16}"/>
+                <a16:creationId xmlns:a16="http://schemas.microsoft.com/office/drawing/2014/main" id="{FFBAD284-115D-8814-3F2F-20FCF4F8CC51}"/>
               </a:ext>
             </a:extLst>
           </p:cNvPr>
@@ -8165,8 +8505,12 @@
           <a:lstStyle/>
           <a:p>
             <a:r>
+              <a:rPr lang="de-DE" dirty="0"/>
+              <a:t>turn </a:t>
+            </a:r>
+            <a:r>
               <a:rPr lang="de-DE" dirty="0" err="1"/>
-              <a:t>finetuning</a:t>
+              <a:t>freeform</a:t>
             </a:r>
             <a:r>
               <a:rPr lang="de-DE" dirty="0"/>
@@ -8174,7 +8518,7 @@
             </a:r>
             <a:r>
               <a:rPr lang="de-DE" dirty="0" err="1"/>
-              <a:t>to</a:t>
+              <a:t>generation</a:t>
             </a:r>
             <a:r>
               <a:rPr lang="de-DE" dirty="0"/>
@@ -8182,7 +8526,7 @@
             </a:r>
             <a:r>
               <a:rPr lang="de-DE" dirty="0" err="1"/>
-              <a:t>improve</a:t>
+              <a:t>into</a:t>
             </a:r>
             <a:r>
               <a:rPr lang="de-DE" dirty="0"/>
@@ -8190,7 +8534,7 @@
             </a:r>
             <a:r>
               <a:rPr lang="de-DE" dirty="0" err="1"/>
-              <a:t>reasoning</a:t>
+              <a:t>parsable</a:t>
             </a:r>
             <a:r>
               <a:rPr lang="de-DE" dirty="0"/>
@@ -8198,70 +8542,24 @@
             </a:r>
             <a:r>
               <a:rPr lang="de-DE" dirty="0" err="1"/>
-              <a:t>capabilities</a:t>
-            </a:r>
-            <a:r>
-              <a:rPr lang="de-DE" dirty="0"/>
-              <a:t> </a:t>
-            </a:r>
-            <a:r>
-              <a:rPr lang="de-DE" dirty="0" err="1"/>
-              <a:t>of</a:t>
-            </a:r>
-            <a:r>
-              <a:rPr lang="de-DE" dirty="0"/>
-              <a:t> LLMs</a:t>
-            </a:r>
-          </a:p>
-          <a:p>
+              <a:t>formats</a:t>
+            </a:r>
             <a:endParaRPr lang="de-DE" dirty="0"/>
           </a:p>
           <a:p>
-            <a:r>
-              <a:rPr lang="de-DE" dirty="0" err="1"/>
-              <a:t>explicitly</a:t>
-            </a:r>
-            <a:r>
-              <a:rPr lang="de-DE" dirty="0"/>
-              <a:t> </a:t>
-            </a:r>
-            <a:r>
-              <a:rPr lang="de-DE" dirty="0" err="1"/>
-              <a:t>trained</a:t>
-            </a:r>
-            <a:r>
-              <a:rPr lang="de-DE" dirty="0"/>
-              <a:t> </a:t>
-            </a:r>
-            <a:r>
-              <a:rPr lang="de-DE" dirty="0" err="1"/>
-              <a:t>to</a:t>
-            </a:r>
-            <a:r>
-              <a:rPr lang="de-DE" dirty="0"/>
-              <a:t> perform native </a:t>
-            </a:r>
-            <a:r>
-              <a:rPr lang="de-DE" dirty="0" err="1"/>
-              <a:t>thinking</a:t>
-            </a:r>
-            <a:r>
-              <a:rPr lang="de-DE" dirty="0"/>
-              <a:t> </a:t>
-            </a:r>
-            <a:r>
-              <a:rPr lang="de-DE" dirty="0" err="1"/>
-              <a:t>or</a:t>
-            </a:r>
-            <a:r>
-              <a:rPr lang="de-DE" dirty="0"/>
-              <a:t> </a:t>
-            </a:r>
-            <a:r>
-              <a:rPr lang="de-DE" dirty="0" err="1"/>
-              <a:t>chain-of-thought</a:t>
-            </a:r>
+            <a:pPr marL="0" indent="0">
+              <a:buNone/>
+            </a:pPr>
             <a:endParaRPr lang="de-DE" dirty="0"/>
+          </a:p>
+          <a:p>
+            <a:pPr marL="0" indent="0">
+              <a:buNone/>
+            </a:pPr>
+            <a:r>
+              <a:rPr lang="de-DE" dirty="0"/>
+              <a:t>…</a:t>
+            </a:r>
           </a:p>
         </p:txBody>
       </p:sp>
@@ -8270,7 +8568,7 @@
           <p:cNvPr id="4" name="Foliennummernplatzhalter 3">
             <a:extLst>
               <a:ext uri="{FF2B5EF4-FFF2-40B4-BE49-F238E27FC236}">
-                <a16:creationId xmlns:a16="http://schemas.microsoft.com/office/drawing/2014/main" id="{3B650135-6F1E-0A6A-7FAD-339FF4010258}"/>
+                <a16:creationId xmlns:a16="http://schemas.microsoft.com/office/drawing/2014/main" id="{B82ACC4D-CF30-105F-C4EC-D49CA20EF1B1}"/>
               </a:ext>
             </a:extLst>
           </p:cNvPr>
@@ -8297,7 +8595,7 @@
     </p:spTree>
     <p:extLst>
       <p:ext uri="{BB962C8B-B14F-4D97-AF65-F5344CB8AC3E}">
-        <p14:creationId xmlns:p14="http://schemas.microsoft.com/office/powerpoint/2010/main" val="202159617"/>
+        <p14:creationId xmlns:p14="http://schemas.microsoft.com/office/powerpoint/2010/main" val="2796823347"/>
       </p:ext>
     </p:extLst>
   </p:cSld>
@@ -8326,10 +8624,10 @@
       </p:grpSpPr>
       <p:sp>
         <p:nvSpPr>
-          <p:cNvPr id="2" name="Titel 1">
-            <a:extLst>
-              <a:ext uri="{FF2B5EF4-FFF2-40B4-BE49-F238E27FC236}">
-                <a16:creationId xmlns:a16="http://schemas.microsoft.com/office/drawing/2014/main" id="{466C20C4-5209-19D7-483A-98696C4679A6}"/>
+          <p:cNvPr id="2" name="Title 1">
+            <a:extLst>
+              <a:ext uri="{FF2B5EF4-FFF2-40B4-BE49-F238E27FC236}">
+                <a16:creationId xmlns:a16="http://schemas.microsoft.com/office/drawing/2014/main" id="{E11A793F-C8E0-AABA-06EF-BF5916C1A755}"/>
               </a:ext>
             </a:extLst>
           </p:cNvPr>
@@ -8346,64 +8644,18 @@
           <a:lstStyle/>
           <a:p>
             <a:r>
-              <a:rPr lang="de-DE" dirty="0"/>
-              <a:t>Test-Time Training</a:t>
+              <a:rPr lang="en-GB" dirty="0"/>
+              <a:t>Goal: Autonomous End-to-End Workflow</a:t>
             </a:r>
           </a:p>
         </p:txBody>
       </p:sp>
       <p:sp>
         <p:nvSpPr>
-          <p:cNvPr id="3" name="Inhaltsplatzhalter 2">
-            <a:extLst>
-              <a:ext uri="{FF2B5EF4-FFF2-40B4-BE49-F238E27FC236}">
-                <a16:creationId xmlns:a16="http://schemas.microsoft.com/office/drawing/2014/main" id="{C5BB78A2-9831-C082-306C-27212A8FF535}"/>
-              </a:ext>
-            </a:extLst>
-          </p:cNvPr>
-          <p:cNvSpPr>
-            <a:spLocks noGrp="1"/>
-          </p:cNvSpPr>
-          <p:nvPr>
-            <p:ph idx="1"/>
-          </p:nvPr>
-        </p:nvSpPr>
-        <p:spPr/>
-        <p:txBody>
-          <a:bodyPr/>
-          <a:lstStyle/>
-          <a:p>
-            <a:r>
-              <a:rPr lang="de-DE" dirty="0">
-                <a:hlinkClick r:id="rId2"/>
-              </a:rPr>
-              <a:t>TTT</a:t>
-            </a:r>
-            <a:endParaRPr lang="de-DE" dirty="0"/>
-          </a:p>
-          <a:p>
-            <a:pPr marL="0" indent="0">
-              <a:buNone/>
-            </a:pPr>
-            <a:endParaRPr lang="de-DE" dirty="0"/>
-          </a:p>
-          <a:p>
-            <a:pPr marL="0" indent="0">
-              <a:buNone/>
-            </a:pPr>
-            <a:r>
-              <a:rPr lang="de-DE" dirty="0"/>
-              <a:t>…</a:t>
-            </a:r>
-          </a:p>
-        </p:txBody>
-      </p:sp>
-      <p:sp>
-        <p:nvSpPr>
-          <p:cNvPr id="4" name="Foliennummernplatzhalter 3">
-            <a:extLst>
-              <a:ext uri="{FF2B5EF4-FFF2-40B4-BE49-F238E27FC236}">
-                <a16:creationId xmlns:a16="http://schemas.microsoft.com/office/drawing/2014/main" id="{E0A53C98-BCF2-DF15-62E2-53F1B7EE2D64}"/>
+          <p:cNvPr id="4" name="Slide Number Placeholder 3">
+            <a:extLst>
+              <a:ext uri="{FF2B5EF4-FFF2-40B4-BE49-F238E27FC236}">
+                <a16:creationId xmlns:a16="http://schemas.microsoft.com/office/drawing/2014/main" id="{F5B1DA0A-3394-1274-5D3F-3D2BFD3C2D25}"/>
               </a:ext>
             </a:extLst>
           </p:cNvPr>
@@ -8419,715 +8671,9 @@
           <a:bodyPr/>
           <a:lstStyle/>
           <a:p>
-            <a:fld id="{4055531C-5681-6B44-B2CA-926D7A74B06D}" type="slidenum">
-              <a:rPr lang="de-DE" smtClean="0"/>
-              <a:t>16</a:t>
-            </a:fld>
-            <a:endParaRPr lang="de-DE"/>
-          </a:p>
-        </p:txBody>
-      </p:sp>
-    </p:spTree>
-    <p:extLst>
-      <p:ext uri="{BB962C8B-B14F-4D97-AF65-F5344CB8AC3E}">
-        <p14:creationId xmlns:p14="http://schemas.microsoft.com/office/powerpoint/2010/main" val="3664914328"/>
-      </p:ext>
-    </p:extLst>
-  </p:cSld>
-  <p:clrMapOvr>
-    <a:masterClrMapping/>
-  </p:clrMapOvr>
-</p:sld>
-</file>
-
-<file path=ppt/slides/slide17.xml><?xml version="1.0" encoding="utf-8"?>
-<p:sld xmlns:a="http://schemas.openxmlformats.org/drawingml/2006/main" xmlns:r="http://schemas.openxmlformats.org/officeDocument/2006/relationships" xmlns:p="http://schemas.openxmlformats.org/presentationml/2006/main">
-  <p:cSld>
-    <p:spTree>
-      <p:nvGrpSpPr>
-        <p:cNvPr id="1" name=""/>
-        <p:cNvGrpSpPr/>
-        <p:nvPr/>
-      </p:nvGrpSpPr>
-      <p:grpSpPr>
-        <a:xfrm>
-          <a:off x="0" y="0"/>
-          <a:ext cx="0" cy="0"/>
-          <a:chOff x="0" y="0"/>
-          <a:chExt cx="0" cy="0"/>
-        </a:xfrm>
-      </p:grpSpPr>
-      <p:sp>
-        <p:nvSpPr>
-          <p:cNvPr id="2" name="Titel 1">
-            <a:extLst>
-              <a:ext uri="{FF2B5EF4-FFF2-40B4-BE49-F238E27FC236}">
-                <a16:creationId xmlns:a16="http://schemas.microsoft.com/office/drawing/2014/main" id="{B76BB335-B909-3481-F78C-2F6FA8F65992}"/>
-              </a:ext>
-            </a:extLst>
-          </p:cNvPr>
-          <p:cNvSpPr>
-            <a:spLocks noGrp="1"/>
-          </p:cNvSpPr>
-          <p:nvPr>
-            <p:ph type="title"/>
-          </p:nvPr>
-        </p:nvSpPr>
-        <p:spPr/>
-        <p:txBody>
-          <a:bodyPr/>
-          <a:lstStyle/>
-          <a:p>
-            <a:r>
-              <a:rPr lang="de-DE" dirty="0" err="1"/>
-              <a:t>Agents</a:t>
-            </a:r>
-            <a:r>
-              <a:rPr lang="de-DE" dirty="0"/>
-              <a:t> and LLM Orchestration</a:t>
-            </a:r>
-          </a:p>
-        </p:txBody>
-      </p:sp>
-      <p:sp>
-        <p:nvSpPr>
-          <p:cNvPr id="3" name="Inhaltsplatzhalter 2">
-            <a:extLst>
-              <a:ext uri="{FF2B5EF4-FFF2-40B4-BE49-F238E27FC236}">
-                <a16:creationId xmlns:a16="http://schemas.microsoft.com/office/drawing/2014/main" id="{D8B74722-F2FE-4CB7-44ED-EDB2E891B7F6}"/>
-              </a:ext>
-            </a:extLst>
-          </p:cNvPr>
-          <p:cNvSpPr>
-            <a:spLocks noGrp="1"/>
-          </p:cNvSpPr>
-          <p:nvPr>
-            <p:ph idx="1"/>
-          </p:nvPr>
-        </p:nvSpPr>
-        <p:spPr/>
-        <p:txBody>
-          <a:bodyPr>
-            <a:normAutofit fontScale="92500"/>
-          </a:bodyPr>
-          <a:lstStyle/>
-          <a:p>
-            <a:pPr marL="0" indent="0">
-              <a:buNone/>
-            </a:pPr>
-            <a:r>
-              <a:rPr lang="de-DE" dirty="0" err="1"/>
-              <a:t>LangChain</a:t>
-            </a:r>
-            <a:r>
-              <a:rPr lang="de-DE" dirty="0"/>
-              <a:t>, </a:t>
-            </a:r>
-            <a:r>
-              <a:rPr lang="de-DE" dirty="0" err="1"/>
-              <a:t>AutoGPT</a:t>
-            </a:r>
-            <a:r>
-              <a:rPr lang="de-DE" dirty="0"/>
-              <a:t>, </a:t>
-            </a:r>
-            <a:r>
-              <a:rPr lang="de-DE" dirty="0" err="1"/>
-              <a:t>OpenAgents</a:t>
-            </a:r>
-            <a:r>
-              <a:rPr lang="de-DE" dirty="0"/>
-              <a:t>, </a:t>
-            </a:r>
-            <a:r>
-              <a:rPr lang="de-DE" dirty="0" err="1"/>
-              <a:t>BabyAGI</a:t>
-            </a:r>
-            <a:r>
-              <a:rPr lang="de-DE" dirty="0"/>
-              <a:t>, …</a:t>
-            </a:r>
-          </a:p>
-          <a:p>
-            <a:pPr marL="0" indent="0">
-              <a:buNone/>
-            </a:pPr>
-            <a:endParaRPr lang="de-DE" b="1" dirty="0"/>
-          </a:p>
-          <a:p>
-            <a:pPr marL="0" indent="0">
-              <a:buNone/>
-            </a:pPr>
-            <a:r>
-              <a:rPr lang="de-DE" b="1" dirty="0" err="1"/>
-              <a:t>prompting</a:t>
-            </a:r>
-            <a:r>
-              <a:rPr lang="de-DE" b="1" dirty="0"/>
-              <a:t> </a:t>
-            </a:r>
-            <a:r>
-              <a:rPr lang="de-DE" b="1" dirty="0" err="1"/>
-              <a:t>strategies</a:t>
-            </a:r>
-            <a:r>
-              <a:rPr lang="de-DE" b="1" dirty="0"/>
-              <a:t> + </a:t>
-            </a:r>
-            <a:r>
-              <a:rPr lang="de-DE" b="1" dirty="0" err="1"/>
-              <a:t>orchestration</a:t>
-            </a:r>
-            <a:r>
-              <a:rPr lang="de-DE" b="1" dirty="0"/>
-              <a:t> </a:t>
-            </a:r>
-            <a:r>
-              <a:rPr lang="de-DE" b="1" dirty="0" err="1"/>
-              <a:t>logic</a:t>
-            </a:r>
-            <a:r>
-              <a:rPr lang="de-DE" b="1" dirty="0"/>
-              <a:t> + </a:t>
-            </a:r>
-            <a:r>
-              <a:rPr lang="de-DE" b="1" dirty="0" err="1"/>
-              <a:t>access</a:t>
-            </a:r>
-            <a:r>
-              <a:rPr lang="de-DE" b="1" dirty="0"/>
-              <a:t> </a:t>
-            </a:r>
-            <a:r>
-              <a:rPr lang="de-DE" b="1" dirty="0" err="1"/>
-              <a:t>to</a:t>
-            </a:r>
-            <a:r>
-              <a:rPr lang="de-DE" b="1" dirty="0"/>
-              <a:t> </a:t>
-            </a:r>
-            <a:r>
-              <a:rPr lang="de-DE" b="1" dirty="0" err="1"/>
-              <a:t>tools</a:t>
-            </a:r>
-            <a:r>
-              <a:rPr lang="de-DE" b="1" dirty="0"/>
-              <a:t>/</a:t>
-            </a:r>
-            <a:r>
-              <a:rPr lang="de-DE" b="1" dirty="0" err="1"/>
-              <a:t>memory</a:t>
-            </a:r>
-            <a:r>
-              <a:rPr lang="de-DE" dirty="0"/>
-              <a:t> </a:t>
-            </a:r>
-            <a:br>
-              <a:rPr lang="de-DE" dirty="0"/>
-            </a:br>
-            <a:endParaRPr lang="de-DE" dirty="0"/>
-          </a:p>
-          <a:p>
-            <a:pPr marL="0" indent="0">
-              <a:buNone/>
-            </a:pPr>
-            <a:r>
-              <a:rPr lang="de-DE" dirty="0" err="1"/>
-              <a:t>They</a:t>
-            </a:r>
-            <a:r>
-              <a:rPr lang="de-DE" dirty="0"/>
-              <a:t> </a:t>
-            </a:r>
-            <a:r>
-              <a:rPr lang="de-DE" b="1" dirty="0" err="1"/>
-              <a:t>wrap</a:t>
-            </a:r>
-            <a:r>
-              <a:rPr lang="de-DE" dirty="0"/>
-              <a:t> an LLM (like GPT-4) in an </a:t>
-            </a:r>
-            <a:r>
-              <a:rPr lang="de-DE" dirty="0" err="1"/>
-              <a:t>architecture</a:t>
-            </a:r>
-            <a:r>
-              <a:rPr lang="de-DE" dirty="0"/>
-              <a:t> </a:t>
-            </a:r>
-            <a:r>
-              <a:rPr lang="de-DE" dirty="0" err="1"/>
-              <a:t>that</a:t>
-            </a:r>
-            <a:r>
-              <a:rPr lang="de-DE" dirty="0"/>
-              <a:t> </a:t>
-            </a:r>
-            <a:r>
-              <a:rPr lang="de-DE" dirty="0" err="1"/>
-              <a:t>allows</a:t>
-            </a:r>
-            <a:r>
-              <a:rPr lang="de-DE" dirty="0"/>
-              <a:t> </a:t>
-            </a:r>
-            <a:r>
-              <a:rPr lang="de-DE" dirty="0" err="1"/>
-              <a:t>it</a:t>
-            </a:r>
-            <a:r>
-              <a:rPr lang="de-DE" dirty="0"/>
-              <a:t> </a:t>
-            </a:r>
-            <a:r>
-              <a:rPr lang="de-DE" dirty="0" err="1"/>
-              <a:t>to</a:t>
-            </a:r>
-            <a:r>
-              <a:rPr lang="de-DE" dirty="0"/>
-              <a:t>:</a:t>
-            </a:r>
-          </a:p>
-          <a:p>
-            <a:r>
-              <a:rPr lang="de-DE" b="1" dirty="0"/>
-              <a:t>Prompt </a:t>
-            </a:r>
-            <a:r>
-              <a:rPr lang="de-DE" b="1" dirty="0" err="1"/>
-              <a:t>itself</a:t>
-            </a:r>
-            <a:r>
-              <a:rPr lang="de-DE" b="1" dirty="0"/>
-              <a:t> in a loop</a:t>
-            </a:r>
-            <a:r>
-              <a:rPr lang="de-DE" dirty="0"/>
-              <a:t> (</a:t>
-            </a:r>
-            <a:r>
-              <a:rPr lang="de-DE" dirty="0" err="1"/>
-              <a:t>self-reflect</a:t>
-            </a:r>
-            <a:r>
-              <a:rPr lang="de-DE" dirty="0"/>
-              <a:t>, plan, </a:t>
-            </a:r>
-            <a:r>
-              <a:rPr lang="de-DE" dirty="0" err="1"/>
-              <a:t>re</a:t>
-            </a:r>
-            <a:r>
-              <a:rPr lang="de-DE" dirty="0"/>
-              <a:t>-prompt).</a:t>
-            </a:r>
-          </a:p>
-          <a:p>
-            <a:r>
-              <a:rPr lang="de-DE" b="1" dirty="0" err="1"/>
-              <a:t>Persist</a:t>
-            </a:r>
-            <a:r>
-              <a:rPr lang="de-DE" b="1" dirty="0"/>
-              <a:t> </a:t>
-            </a:r>
-            <a:r>
-              <a:rPr lang="de-DE" b="1" dirty="0" err="1"/>
-              <a:t>state</a:t>
-            </a:r>
-            <a:r>
-              <a:rPr lang="de-DE" dirty="0"/>
-              <a:t> (via </a:t>
-            </a:r>
-            <a:r>
-              <a:rPr lang="de-DE" dirty="0" err="1"/>
-              <a:t>memory</a:t>
-            </a:r>
-            <a:r>
-              <a:rPr lang="de-DE" dirty="0"/>
-              <a:t>, </a:t>
-            </a:r>
-            <a:r>
-              <a:rPr lang="de-DE" dirty="0" err="1"/>
-              <a:t>databases</a:t>
-            </a:r>
-            <a:r>
-              <a:rPr lang="de-DE" dirty="0"/>
-              <a:t>).</a:t>
-            </a:r>
-          </a:p>
-          <a:p>
-            <a:r>
-              <a:rPr lang="de-DE" b="1" dirty="0"/>
-              <a:t>Call external </a:t>
-            </a:r>
-            <a:r>
-              <a:rPr lang="de-DE" b="1" dirty="0" err="1"/>
-              <a:t>tools</a:t>
-            </a:r>
-            <a:r>
-              <a:rPr lang="de-DE" b="1" dirty="0"/>
-              <a:t>/APIs</a:t>
-            </a:r>
-            <a:r>
-              <a:rPr lang="de-DE" dirty="0"/>
-              <a:t> (web </a:t>
-            </a:r>
-            <a:r>
-              <a:rPr lang="de-DE" dirty="0" err="1"/>
-              <a:t>search</a:t>
-            </a:r>
-            <a:r>
-              <a:rPr lang="de-DE" dirty="0"/>
-              <a:t>, code </a:t>
-            </a:r>
-            <a:r>
-              <a:rPr lang="de-DE" dirty="0" err="1"/>
-              <a:t>execution</a:t>
-            </a:r>
-            <a:r>
-              <a:rPr lang="de-DE" dirty="0"/>
-              <a:t>, </a:t>
-            </a:r>
-            <a:r>
-              <a:rPr lang="de-DE" dirty="0" err="1"/>
-              <a:t>file</a:t>
-            </a:r>
-            <a:r>
-              <a:rPr lang="de-DE" dirty="0"/>
-              <a:t> </a:t>
-            </a:r>
-            <a:r>
-              <a:rPr lang="de-DE" dirty="0" err="1"/>
-              <a:t>systems</a:t>
-            </a:r>
-            <a:r>
-              <a:rPr lang="de-DE" dirty="0"/>
-              <a:t>).</a:t>
-            </a:r>
-          </a:p>
-          <a:p>
-            <a:r>
-              <a:rPr lang="de-DE" b="1" dirty="0" err="1"/>
-              <a:t>Iteratively</a:t>
-            </a:r>
-            <a:r>
-              <a:rPr lang="de-DE" b="1" dirty="0"/>
-              <a:t> </a:t>
-            </a:r>
-            <a:r>
-              <a:rPr lang="de-DE" b="1" dirty="0" err="1"/>
-              <a:t>refine</a:t>
-            </a:r>
-            <a:r>
-              <a:rPr lang="de-DE" b="1" dirty="0"/>
-              <a:t> </a:t>
-            </a:r>
-            <a:r>
-              <a:rPr lang="de-DE" b="1" dirty="0" err="1"/>
-              <a:t>output</a:t>
-            </a:r>
-            <a:r>
-              <a:rPr lang="de-DE" dirty="0"/>
-              <a:t> </a:t>
-            </a:r>
-            <a:r>
-              <a:rPr lang="de-DE" dirty="0" err="1"/>
-              <a:t>toward</a:t>
-            </a:r>
-            <a:r>
-              <a:rPr lang="de-DE" dirty="0"/>
-              <a:t> a </a:t>
-            </a:r>
-            <a:r>
-              <a:rPr lang="de-DE" dirty="0" err="1"/>
-              <a:t>goal</a:t>
-            </a:r>
-            <a:r>
-              <a:rPr lang="de-DE" dirty="0"/>
-              <a:t>.</a:t>
-            </a:r>
-          </a:p>
-        </p:txBody>
-      </p:sp>
-      <p:sp>
-        <p:nvSpPr>
-          <p:cNvPr id="4" name="Foliennummernplatzhalter 3">
-            <a:extLst>
-              <a:ext uri="{FF2B5EF4-FFF2-40B4-BE49-F238E27FC236}">
-                <a16:creationId xmlns:a16="http://schemas.microsoft.com/office/drawing/2014/main" id="{0868C356-CB0F-390F-3607-F244D67E92D3}"/>
-              </a:ext>
-            </a:extLst>
-          </p:cNvPr>
-          <p:cNvSpPr>
-            <a:spLocks noGrp="1"/>
-          </p:cNvSpPr>
-          <p:nvPr>
-            <p:ph type="sldNum" sz="quarter" idx="12"/>
-          </p:nvPr>
-        </p:nvSpPr>
-        <p:spPr/>
-        <p:txBody>
-          <a:bodyPr/>
-          <a:lstStyle/>
-          <a:p>
-            <a:fld id="{4055531C-5681-6B44-B2CA-926D7A74B06D}" type="slidenum">
-              <a:rPr lang="de-DE" smtClean="0"/>
-              <a:t>17</a:t>
-            </a:fld>
-            <a:endParaRPr lang="de-DE"/>
-          </a:p>
-        </p:txBody>
-      </p:sp>
-    </p:spTree>
-    <p:extLst>
-      <p:ext uri="{BB962C8B-B14F-4D97-AF65-F5344CB8AC3E}">
-        <p14:creationId xmlns:p14="http://schemas.microsoft.com/office/powerpoint/2010/main" val="2276534947"/>
-      </p:ext>
-    </p:extLst>
-  </p:cSld>
-  <p:clrMapOvr>
-    <a:masterClrMapping/>
-  </p:clrMapOvr>
-</p:sld>
-</file>
-
-<file path=ppt/slides/slide18.xml><?xml version="1.0" encoding="utf-8"?>
-<p:sld xmlns:a="http://schemas.openxmlformats.org/drawingml/2006/main" xmlns:r="http://schemas.openxmlformats.org/officeDocument/2006/relationships" xmlns:p="http://schemas.openxmlformats.org/presentationml/2006/main">
-  <p:cSld>
-    <p:spTree>
-      <p:nvGrpSpPr>
-        <p:cNvPr id="1" name=""/>
-        <p:cNvGrpSpPr/>
-        <p:nvPr/>
-      </p:nvGrpSpPr>
-      <p:grpSpPr>
-        <a:xfrm>
-          <a:off x="0" y="0"/>
-          <a:ext cx="0" cy="0"/>
-          <a:chOff x="0" y="0"/>
-          <a:chExt cx="0" cy="0"/>
-        </a:xfrm>
-      </p:grpSpPr>
-      <p:sp>
-        <p:nvSpPr>
-          <p:cNvPr id="2" name="Titel 1">
-            <a:extLst>
-              <a:ext uri="{FF2B5EF4-FFF2-40B4-BE49-F238E27FC236}">
-                <a16:creationId xmlns:a16="http://schemas.microsoft.com/office/drawing/2014/main" id="{7A303D78-315B-F9C7-BAA4-AC1A14712C00}"/>
-              </a:ext>
-            </a:extLst>
-          </p:cNvPr>
-          <p:cNvSpPr>
-            <a:spLocks noGrp="1"/>
-          </p:cNvSpPr>
-          <p:nvPr>
-            <p:ph type="title"/>
-          </p:nvPr>
-        </p:nvSpPr>
-        <p:spPr/>
-        <p:txBody>
-          <a:bodyPr/>
-          <a:lstStyle/>
-          <a:p>
-            <a:r>
-              <a:rPr lang="de-DE" dirty="0"/>
-              <a:t>Structured Outputs</a:t>
-            </a:r>
-          </a:p>
-        </p:txBody>
-      </p:sp>
-      <p:sp>
-        <p:nvSpPr>
-          <p:cNvPr id="3" name="Inhaltsplatzhalter 2">
-            <a:extLst>
-              <a:ext uri="{FF2B5EF4-FFF2-40B4-BE49-F238E27FC236}">
-                <a16:creationId xmlns:a16="http://schemas.microsoft.com/office/drawing/2014/main" id="{FFBAD284-115D-8814-3F2F-20FCF4F8CC51}"/>
-              </a:ext>
-            </a:extLst>
-          </p:cNvPr>
-          <p:cNvSpPr>
-            <a:spLocks noGrp="1"/>
-          </p:cNvSpPr>
-          <p:nvPr>
-            <p:ph idx="1"/>
-          </p:nvPr>
-        </p:nvSpPr>
-        <p:spPr/>
-        <p:txBody>
-          <a:bodyPr/>
-          <a:lstStyle/>
-          <a:p>
-            <a:r>
-              <a:rPr lang="de-DE" dirty="0"/>
-              <a:t>turn </a:t>
-            </a:r>
-            <a:r>
-              <a:rPr lang="de-DE" dirty="0" err="1"/>
-              <a:t>freeform</a:t>
-            </a:r>
-            <a:r>
-              <a:rPr lang="de-DE" dirty="0"/>
-              <a:t> </a:t>
-            </a:r>
-            <a:r>
-              <a:rPr lang="de-DE" dirty="0" err="1"/>
-              <a:t>generation</a:t>
-            </a:r>
-            <a:r>
-              <a:rPr lang="de-DE" dirty="0"/>
-              <a:t> </a:t>
-            </a:r>
-            <a:r>
-              <a:rPr lang="de-DE" dirty="0" err="1"/>
-              <a:t>into</a:t>
-            </a:r>
-            <a:r>
-              <a:rPr lang="de-DE" dirty="0"/>
-              <a:t> </a:t>
-            </a:r>
-            <a:r>
-              <a:rPr lang="de-DE" dirty="0" err="1"/>
-              <a:t>parsable</a:t>
-            </a:r>
-            <a:r>
-              <a:rPr lang="de-DE" dirty="0"/>
-              <a:t> </a:t>
-            </a:r>
-            <a:r>
-              <a:rPr lang="de-DE" dirty="0" err="1"/>
-              <a:t>formats</a:t>
-            </a:r>
-            <a:endParaRPr lang="de-DE" dirty="0"/>
-          </a:p>
-          <a:p>
-            <a:pPr marL="0" indent="0">
-              <a:buNone/>
-            </a:pPr>
-            <a:endParaRPr lang="de-DE" dirty="0"/>
-          </a:p>
-          <a:p>
-            <a:pPr marL="0" indent="0">
-              <a:buNone/>
-            </a:pPr>
-            <a:r>
-              <a:rPr lang="de-DE" dirty="0"/>
-              <a:t>…</a:t>
-            </a:r>
-          </a:p>
-        </p:txBody>
-      </p:sp>
-      <p:sp>
-        <p:nvSpPr>
-          <p:cNvPr id="4" name="Foliennummernplatzhalter 3">
-            <a:extLst>
-              <a:ext uri="{FF2B5EF4-FFF2-40B4-BE49-F238E27FC236}">
-                <a16:creationId xmlns:a16="http://schemas.microsoft.com/office/drawing/2014/main" id="{B82ACC4D-CF30-105F-C4EC-D49CA20EF1B1}"/>
-              </a:ext>
-            </a:extLst>
-          </p:cNvPr>
-          <p:cNvSpPr>
-            <a:spLocks noGrp="1"/>
-          </p:cNvSpPr>
-          <p:nvPr>
-            <p:ph type="sldNum" sz="quarter" idx="12"/>
-          </p:nvPr>
-        </p:nvSpPr>
-        <p:spPr/>
-        <p:txBody>
-          <a:bodyPr/>
-          <a:lstStyle/>
-          <a:p>
-            <a:fld id="{4055531C-5681-6B44-B2CA-926D7A74B06D}" type="slidenum">
-              <a:rPr lang="de-DE" smtClean="0"/>
-              <a:t>18</a:t>
-            </a:fld>
-            <a:endParaRPr lang="de-DE"/>
-          </a:p>
-        </p:txBody>
-      </p:sp>
-    </p:spTree>
-    <p:extLst>
-      <p:ext uri="{BB962C8B-B14F-4D97-AF65-F5344CB8AC3E}">
-        <p14:creationId xmlns:p14="http://schemas.microsoft.com/office/powerpoint/2010/main" val="2796823347"/>
-      </p:ext>
-    </p:extLst>
-  </p:cSld>
-  <p:clrMapOvr>
-    <a:masterClrMapping/>
-  </p:clrMapOvr>
-</p:sld>
-</file>
-
-<file path=ppt/slides/slide19.xml><?xml version="1.0" encoding="utf-8"?>
-<p:sld xmlns:a="http://schemas.openxmlformats.org/drawingml/2006/main" xmlns:r="http://schemas.openxmlformats.org/officeDocument/2006/relationships" xmlns:p="http://schemas.openxmlformats.org/presentationml/2006/main">
-  <p:cSld>
-    <p:spTree>
-      <p:nvGrpSpPr>
-        <p:cNvPr id="1" name=""/>
-        <p:cNvGrpSpPr/>
-        <p:nvPr/>
-      </p:nvGrpSpPr>
-      <p:grpSpPr>
-        <a:xfrm>
-          <a:off x="0" y="0"/>
-          <a:ext cx="0" cy="0"/>
-          <a:chOff x="0" y="0"/>
-          <a:chExt cx="0" cy="0"/>
-        </a:xfrm>
-      </p:grpSpPr>
-      <p:sp>
-        <p:nvSpPr>
-          <p:cNvPr id="2" name="Title 1">
-            <a:extLst>
-              <a:ext uri="{FF2B5EF4-FFF2-40B4-BE49-F238E27FC236}">
-                <a16:creationId xmlns:a16="http://schemas.microsoft.com/office/drawing/2014/main" id="{E11A793F-C8E0-AABA-06EF-BF5916C1A755}"/>
-              </a:ext>
-            </a:extLst>
-          </p:cNvPr>
-          <p:cNvSpPr>
-            <a:spLocks noGrp="1"/>
-          </p:cNvSpPr>
-          <p:nvPr>
-            <p:ph type="title"/>
-          </p:nvPr>
-        </p:nvSpPr>
-        <p:spPr/>
-        <p:txBody>
-          <a:bodyPr/>
-          <a:lstStyle/>
-          <a:p>
-            <a:r>
-              <a:rPr lang="en-GB" dirty="0"/>
-              <a:t>Goal: Autonomous End-to-End Workflow</a:t>
-            </a:r>
-          </a:p>
-        </p:txBody>
-      </p:sp>
-      <p:sp>
-        <p:nvSpPr>
-          <p:cNvPr id="4" name="Slide Number Placeholder 3">
-            <a:extLst>
-              <a:ext uri="{FF2B5EF4-FFF2-40B4-BE49-F238E27FC236}">
-                <a16:creationId xmlns:a16="http://schemas.microsoft.com/office/drawing/2014/main" id="{F5B1DA0A-3394-1274-5D3F-3D2BFD3C2D25}"/>
-              </a:ext>
-            </a:extLst>
-          </p:cNvPr>
-          <p:cNvSpPr>
-            <a:spLocks noGrp="1"/>
-          </p:cNvSpPr>
-          <p:nvPr>
-            <p:ph type="sldNum" sz="quarter" idx="12"/>
-          </p:nvPr>
-        </p:nvSpPr>
-        <p:spPr/>
-        <p:txBody>
-          <a:bodyPr/>
-          <a:lstStyle/>
-          <a:p>
             <a:fld id="{CC3EA844-D84E-46D3-B34D-D5A70E978FE4}" type="slidenum">
               <a:rPr lang="en-GB" smtClean="0"/>
-              <a:t>19</a:t>
+              <a:t>16</a:t>
             </a:fld>
             <a:endParaRPr lang="en-GB"/>
           </a:p>
@@ -9950,125 +9496,7 @@
 </p:sld>
 </file>
 
-<file path=ppt/slides/slide2.xml><?xml version="1.0" encoding="utf-8"?>
-<p:sld xmlns:a="http://schemas.openxmlformats.org/drawingml/2006/main" xmlns:r="http://schemas.openxmlformats.org/officeDocument/2006/relationships" xmlns:p="http://schemas.openxmlformats.org/presentationml/2006/main">
-  <p:cSld>
-    <p:spTree>
-      <p:nvGrpSpPr>
-        <p:cNvPr id="1" name=""/>
-        <p:cNvGrpSpPr/>
-        <p:nvPr/>
-      </p:nvGrpSpPr>
-      <p:grpSpPr>
-        <a:xfrm>
-          <a:off x="0" y="0"/>
-          <a:ext cx="0" cy="0"/>
-          <a:chOff x="0" y="0"/>
-          <a:chExt cx="0" cy="0"/>
-        </a:xfrm>
-      </p:grpSpPr>
-      <p:sp>
-        <p:nvSpPr>
-          <p:cNvPr id="2" name="Titel 1">
-            <a:extLst>
-              <a:ext uri="{FF2B5EF4-FFF2-40B4-BE49-F238E27FC236}">
-                <a16:creationId xmlns:a16="http://schemas.microsoft.com/office/drawing/2014/main" id="{931DC26F-F544-96F9-A23C-5F55F871FBD9}"/>
-              </a:ext>
-            </a:extLst>
-          </p:cNvPr>
-          <p:cNvSpPr>
-            <a:spLocks noGrp="1"/>
-          </p:cNvSpPr>
-          <p:nvPr>
-            <p:ph type="title"/>
-          </p:nvPr>
-        </p:nvSpPr>
-        <p:spPr/>
-        <p:txBody>
-          <a:bodyPr/>
-          <a:lstStyle/>
-          <a:p>
-            <a:r>
-              <a:rPr lang="de-DE" dirty="0"/>
-              <a:t>Course Contents</a:t>
-            </a:r>
-          </a:p>
-        </p:txBody>
-      </p:sp>
-      <p:graphicFrame>
-        <p:nvGraphicFramePr>
-          <p:cNvPr id="5" name="Inhaltsplatzhalter 2">
-            <a:extLst>
-              <a:ext uri="{FF2B5EF4-FFF2-40B4-BE49-F238E27FC236}">
-                <a16:creationId xmlns:a16="http://schemas.microsoft.com/office/drawing/2014/main" id="{94E61397-BED1-A35E-59D6-1913902B1876}"/>
-              </a:ext>
-            </a:extLst>
-          </p:cNvPr>
-          <p:cNvGraphicFramePr>
-            <a:graphicFrameLocks noGrp="1"/>
-          </p:cNvGraphicFramePr>
-          <p:nvPr>
-            <p:ph idx="1"/>
-            <p:extLst>
-              <p:ext uri="{D42A27DB-BD31-4B8C-83A1-F6EECF244321}">
-                <p14:modId xmlns:p14="http://schemas.microsoft.com/office/powerpoint/2010/main" val="2241600454"/>
-              </p:ext>
-            </p:extLst>
-          </p:nvPr>
-        </p:nvGraphicFramePr>
-        <p:xfrm>
-          <a:off x="838200" y="1825625"/>
-          <a:ext cx="10515600" cy="4351338"/>
-        </p:xfrm>
-        <a:graphic>
-          <a:graphicData uri="http://schemas.openxmlformats.org/drawingml/2006/diagram">
-            <dgm:relIds xmlns:dgm="http://schemas.openxmlformats.org/drawingml/2006/diagram" xmlns:r="http://schemas.openxmlformats.org/officeDocument/2006/relationships" r:dm="rId2" r:lo="rId3" r:qs="rId4" r:cs="rId5"/>
-          </a:graphicData>
-        </a:graphic>
-      </p:graphicFrame>
-      <p:sp>
-        <p:nvSpPr>
-          <p:cNvPr id="3" name="Foliennummernplatzhalter 2">
-            <a:extLst>
-              <a:ext uri="{FF2B5EF4-FFF2-40B4-BE49-F238E27FC236}">
-                <a16:creationId xmlns:a16="http://schemas.microsoft.com/office/drawing/2014/main" id="{60D4E3E1-7C49-4A90-7447-9372AC2530B6}"/>
-              </a:ext>
-            </a:extLst>
-          </p:cNvPr>
-          <p:cNvSpPr>
-            <a:spLocks noGrp="1"/>
-          </p:cNvSpPr>
-          <p:nvPr>
-            <p:ph type="sldNum" sz="quarter" idx="12"/>
-          </p:nvPr>
-        </p:nvSpPr>
-        <p:spPr/>
-        <p:txBody>
-          <a:bodyPr/>
-          <a:lstStyle/>
-          <a:p>
-            <a:fld id="{4055531C-5681-6B44-B2CA-926D7A74B06D}" type="slidenum">
-              <a:rPr lang="de-DE" smtClean="0"/>
-              <a:t>2</a:t>
-            </a:fld>
-            <a:endParaRPr lang="de-DE"/>
-          </a:p>
-        </p:txBody>
-      </p:sp>
-    </p:spTree>
-    <p:extLst>
-      <p:ext uri="{BB962C8B-B14F-4D97-AF65-F5344CB8AC3E}">
-        <p14:creationId xmlns:p14="http://schemas.microsoft.com/office/powerpoint/2010/main" val="2666028082"/>
-      </p:ext>
-    </p:extLst>
-  </p:cSld>
-  <p:clrMapOvr>
-    <a:masterClrMapping/>
-  </p:clrMapOvr>
-</p:sld>
-</file>
-
-<file path=ppt/slides/slide20.xml><?xml version="1.0" encoding="utf-8"?>
+<file path=ppt/slides/slide17.xml><?xml version="1.0" encoding="utf-8"?>
 <p:sld xmlns:a="http://schemas.openxmlformats.org/drawingml/2006/main" xmlns:r="http://schemas.openxmlformats.org/officeDocument/2006/relationships" xmlns:p="http://schemas.openxmlformats.org/presentationml/2006/main">
   <p:cSld>
     <p:bg>
@@ -10288,7 +9716,7 @@
                   <a:spcPts val="600"/>
                 </a:spcAft>
               </a:pPr>
-              <a:t>20</a:t>
+              <a:t>17</a:t>
             </a:fld>
             <a:endParaRPr lang="en-DE">
               <a:solidFill>
@@ -10454,6 +9882,124 @@
 </p:sld>
 </file>
 
+<file path=ppt/slides/slide2.xml><?xml version="1.0" encoding="utf-8"?>
+<p:sld xmlns:a="http://schemas.openxmlformats.org/drawingml/2006/main" xmlns:r="http://schemas.openxmlformats.org/officeDocument/2006/relationships" xmlns:p="http://schemas.openxmlformats.org/presentationml/2006/main">
+  <p:cSld>
+    <p:spTree>
+      <p:nvGrpSpPr>
+        <p:cNvPr id="1" name=""/>
+        <p:cNvGrpSpPr/>
+        <p:nvPr/>
+      </p:nvGrpSpPr>
+      <p:grpSpPr>
+        <a:xfrm>
+          <a:off x="0" y="0"/>
+          <a:ext cx="0" cy="0"/>
+          <a:chOff x="0" y="0"/>
+          <a:chExt cx="0" cy="0"/>
+        </a:xfrm>
+      </p:grpSpPr>
+      <p:sp>
+        <p:nvSpPr>
+          <p:cNvPr id="2" name="Titel 1">
+            <a:extLst>
+              <a:ext uri="{FF2B5EF4-FFF2-40B4-BE49-F238E27FC236}">
+                <a16:creationId xmlns:a16="http://schemas.microsoft.com/office/drawing/2014/main" id="{931DC26F-F544-96F9-A23C-5F55F871FBD9}"/>
+              </a:ext>
+            </a:extLst>
+          </p:cNvPr>
+          <p:cNvSpPr>
+            <a:spLocks noGrp="1"/>
+          </p:cNvSpPr>
+          <p:nvPr>
+            <p:ph type="title"/>
+          </p:nvPr>
+        </p:nvSpPr>
+        <p:spPr/>
+        <p:txBody>
+          <a:bodyPr/>
+          <a:lstStyle/>
+          <a:p>
+            <a:r>
+              <a:rPr lang="de-DE" dirty="0"/>
+              <a:t>Course Contents</a:t>
+            </a:r>
+          </a:p>
+        </p:txBody>
+      </p:sp>
+      <p:graphicFrame>
+        <p:nvGraphicFramePr>
+          <p:cNvPr id="5" name="Inhaltsplatzhalter 2">
+            <a:extLst>
+              <a:ext uri="{FF2B5EF4-FFF2-40B4-BE49-F238E27FC236}">
+                <a16:creationId xmlns:a16="http://schemas.microsoft.com/office/drawing/2014/main" id="{94E61397-BED1-A35E-59D6-1913902B1876}"/>
+              </a:ext>
+            </a:extLst>
+          </p:cNvPr>
+          <p:cNvGraphicFramePr>
+            <a:graphicFrameLocks noGrp="1"/>
+          </p:cNvGraphicFramePr>
+          <p:nvPr>
+            <p:ph idx="1"/>
+            <p:extLst>
+              <p:ext uri="{D42A27DB-BD31-4B8C-83A1-F6EECF244321}">
+                <p14:modId xmlns:p14="http://schemas.microsoft.com/office/powerpoint/2010/main" val="2241600454"/>
+              </p:ext>
+            </p:extLst>
+          </p:nvPr>
+        </p:nvGraphicFramePr>
+        <p:xfrm>
+          <a:off x="838200" y="1825625"/>
+          <a:ext cx="10515600" cy="4351338"/>
+        </p:xfrm>
+        <a:graphic>
+          <a:graphicData uri="http://schemas.openxmlformats.org/drawingml/2006/diagram">
+            <dgm:relIds xmlns:dgm="http://schemas.openxmlformats.org/drawingml/2006/diagram" xmlns:r="http://schemas.openxmlformats.org/officeDocument/2006/relationships" r:dm="rId2" r:lo="rId3" r:qs="rId4" r:cs="rId5"/>
+          </a:graphicData>
+        </a:graphic>
+      </p:graphicFrame>
+      <p:sp>
+        <p:nvSpPr>
+          <p:cNvPr id="3" name="Foliennummernplatzhalter 2">
+            <a:extLst>
+              <a:ext uri="{FF2B5EF4-FFF2-40B4-BE49-F238E27FC236}">
+                <a16:creationId xmlns:a16="http://schemas.microsoft.com/office/drawing/2014/main" id="{60D4E3E1-7C49-4A90-7447-9372AC2530B6}"/>
+              </a:ext>
+            </a:extLst>
+          </p:cNvPr>
+          <p:cNvSpPr>
+            <a:spLocks noGrp="1"/>
+          </p:cNvSpPr>
+          <p:nvPr>
+            <p:ph type="sldNum" sz="quarter" idx="12"/>
+          </p:nvPr>
+        </p:nvSpPr>
+        <p:spPr/>
+        <p:txBody>
+          <a:bodyPr/>
+          <a:lstStyle/>
+          <a:p>
+            <a:fld id="{4055531C-5681-6B44-B2CA-926D7A74B06D}" type="slidenum">
+              <a:rPr lang="de-DE" smtClean="0"/>
+              <a:t>2</a:t>
+            </a:fld>
+            <a:endParaRPr lang="de-DE"/>
+          </a:p>
+        </p:txBody>
+      </p:sp>
+    </p:spTree>
+    <p:extLst>
+      <p:ext uri="{BB962C8B-B14F-4D97-AF65-F5344CB8AC3E}">
+        <p14:creationId xmlns:p14="http://schemas.microsoft.com/office/powerpoint/2010/main" val="2666028082"/>
+      </p:ext>
+    </p:extLst>
+  </p:cSld>
+  <p:clrMapOvr>
+    <a:masterClrMapping/>
+  </p:clrMapOvr>
+</p:sld>
+</file>
+
 <file path=ppt/slides/slide3.xml><?xml version="1.0" encoding="utf-8"?>
 <p:sld xmlns:a="http://schemas.openxmlformats.org/drawingml/2006/main" xmlns:r="http://schemas.openxmlformats.org/officeDocument/2006/relationships" xmlns:p="http://schemas.openxmlformats.org/presentationml/2006/main">
   <p:cSld>
@@ -10577,6 +10123,23 @@
             <a:r>
               <a:rPr lang="de-DE" dirty="0" err="1"/>
               <a:t>planning</a:t>
+            </a:r>
+            <a:endParaRPr lang="de-DE" dirty="0"/>
+          </a:p>
+          <a:p>
+            <a:pPr marL="0" indent="0">
+              <a:buNone/>
+            </a:pPr>
+            <a:endParaRPr lang="de-DE" dirty="0"/>
+          </a:p>
+          <a:p>
+            <a:r>
+              <a:rPr lang="de-DE" dirty="0"/>
+              <a:t>LLM </a:t>
+            </a:r>
+            <a:r>
+              <a:rPr lang="de-DE" dirty="0" err="1"/>
+              <a:t>orchestration</a:t>
             </a:r>
             <a:endParaRPr lang="de-DE" dirty="0"/>
           </a:p>
